--- a/2604/바코스_스터디_2604.pptx
+++ b/2604/바코스_스터디_2604.pptx
@@ -15,6 +15,8 @@
     <p:sldId id="263" r:id="rId14"/>
     <p:sldId id="264" r:id="rId15"/>
     <p:sldId id="265" r:id="rId16"/>
+    <p:sldId id="266" r:id="rId17"/>
+    <p:sldId id="267" r:id="rId18"/>
   </p:sldIdLst>
   <p:sldSz cx="12188952" cy="6858000" type="screen4x3"/>
   <p:notesSz cx="6858000" cy="9144000"/>
@@ -3647,236 +3649,38 @@
                   <a:srgbClr val="FFD700"/>
                 </a:solidFill>
               </a:rPr>
-              <a:t>📸 스터디 인증 사진 (2/2) · 4월 29일</a:t>
-            </a:r>
-          </a:p>
-        </p:txBody>
-      </p:sp>
-      <p:sp>
-        <p:nvSpPr>
-          <p:cNvPr id="4" name="Rectangle 3"/>
-          <p:cNvSpPr/>
-          <p:nvPr/>
-        </p:nvSpPr>
-        <p:spPr>
-          <a:xfrm>
-            <a:off x="1371600" y="868680"/>
-            <a:ext cx="9418320" cy="5303520"/>
-          </a:xfrm>
-          <a:prstGeom prst="rect">
-            <a:avLst/>
-          </a:prstGeom>
-          <a:solidFill>
-            <a:srgbClr val="0A1528"/>
-          </a:solidFill>
-          <a:ln>
-            <a:noFill/>
-          </a:ln>
-        </p:spPr>
-        <p:style>
-          <a:lnRef idx="1">
-            <a:schemeClr val="accent1"/>
-          </a:lnRef>
-          <a:fillRef idx="3">
-            <a:schemeClr val="accent1"/>
-          </a:fillRef>
-          <a:effectRef idx="2">
-            <a:schemeClr val="accent1"/>
-          </a:effectRef>
-          <a:fontRef idx="minor">
-            <a:schemeClr val="lt1"/>
-          </a:fontRef>
-        </p:style>
-        <p:txBody>
-          <a:bodyPr rtlCol="0" anchor="ctr"/>
-          <a:lstStyle/>
-          <a:p>
-            <a:pPr algn="ctr"/>
-          </a:p>
-        </p:txBody>
-      </p:sp>
+              <a:t>📸 스터디 인증 사진 (2/4) · 4월 14일</a:t>
+            </a:r>
+          </a:p>
+        </p:txBody>
+      </p:sp>
+      <p:pic>
+        <p:nvPicPr>
+          <p:cNvPr id="4" name="Picture 3" descr="0414.jpg"/>
+          <p:cNvPicPr>
+            <a:picLocks noChangeAspect="1"/>
+          </p:cNvPicPr>
+          <p:nvPr/>
+        </p:nvPicPr>
+        <p:blipFill>
+          <a:blip r:embed="rId2"/>
+          <a:stretch>
+            <a:fillRect/>
+          </a:stretch>
+        </p:blipFill>
+        <p:spPr>
+          <a:xfrm>
+            <a:off x="2034365" y="914400"/>
+            <a:ext cx="8120222" cy="5303520"/>
+          </a:xfrm>
+          <a:prstGeom prst="rect">
+            <a:avLst/>
+          </a:prstGeom>
+        </p:spPr>
+      </p:pic>
       <p:sp>
         <p:nvSpPr>
           <p:cNvPr id="5" name="Rectangle 4"/>
-          <p:cNvSpPr/>
-          <p:nvPr/>
-        </p:nvSpPr>
-        <p:spPr>
-          <a:xfrm>
-            <a:off x="1417320" y="914400"/>
-            <a:ext cx="9326880" cy="5212080"/>
-          </a:xfrm>
-          <a:prstGeom prst="rect">
-            <a:avLst/>
-          </a:prstGeom>
-          <a:noFill/>
-          <a:ln w="25400">
-            <a:solidFill>
-              <a:srgbClr val="305080"/>
-            </a:solidFill>
-          </a:ln>
-        </p:spPr>
-        <p:style>
-          <a:lnRef idx="1">
-            <a:schemeClr val="accent1"/>
-          </a:lnRef>
-          <a:fillRef idx="3">
-            <a:schemeClr val="accent1"/>
-          </a:fillRef>
-          <a:effectRef idx="2">
-            <a:schemeClr val="accent1"/>
-          </a:effectRef>
-          <a:fontRef idx="minor">
-            <a:schemeClr val="lt1"/>
-          </a:fontRef>
-        </p:style>
-        <p:txBody>
-          <a:bodyPr rtlCol="0" anchor="ctr"/>
-          <a:lstStyle/>
-          <a:p>
-            <a:pPr algn="ctr"/>
-          </a:p>
-        </p:txBody>
-      </p:sp>
-      <p:sp>
-        <p:nvSpPr>
-          <p:cNvPr id="6" name="TextBox 5"/>
-          <p:cNvSpPr txBox="1"/>
-          <p:nvPr/>
-        </p:nvSpPr>
-        <p:spPr>
-          <a:xfrm>
-            <a:off x="5212080" y="2103120"/>
-            <a:ext cx="1828800" cy="1371600"/>
-          </a:xfrm>
-          <a:prstGeom prst="rect">
-            <a:avLst/>
-          </a:prstGeom>
-          <a:noFill/>
-        </p:spPr>
-        <p:txBody>
-          <a:bodyPr wrap="square">
-            <a:spAutoFit/>
-          </a:bodyPr>
-          <a:lstStyle/>
-          <a:p>
-            <a:pPr algn="ctr"/>
-            <a:r>
-              <a:rPr sz="6000" b="0">
-                <a:solidFill>
-                  <a:srgbClr val="305080"/>
-                </a:solidFill>
-              </a:rPr>
-              <a:t>📷</a:t>
-            </a:r>
-          </a:p>
-        </p:txBody>
-      </p:sp>
-      <p:sp>
-        <p:nvSpPr>
-          <p:cNvPr id="7" name="TextBox 6"/>
-          <p:cNvSpPr txBox="1"/>
-          <p:nvPr/>
-        </p:nvSpPr>
-        <p:spPr>
-          <a:xfrm>
-            <a:off x="1828800" y="3474720"/>
-            <a:ext cx="8503920" cy="548640"/>
-          </a:xfrm>
-          <a:prstGeom prst="rect">
-            <a:avLst/>
-          </a:prstGeom>
-          <a:noFill/>
-        </p:spPr>
-        <p:txBody>
-          <a:bodyPr wrap="square">
-            <a:spAutoFit/>
-          </a:bodyPr>
-          <a:lstStyle/>
-          <a:p>
-            <a:pPr algn="ctr"/>
-            <a:r>
-              <a:rPr sz="1800" b="0">
-                <a:solidFill>
-                  <a:srgbClr val="5070A0"/>
-                </a:solidFill>
-              </a:rPr>
-              <a:t>스터디 인증 사진 · 4월 29일</a:t>
-            </a:r>
-          </a:p>
-        </p:txBody>
-      </p:sp>
-      <p:sp>
-        <p:nvSpPr>
-          <p:cNvPr id="8" name="TextBox 7"/>
-          <p:cNvSpPr txBox="1"/>
-          <p:nvPr/>
-        </p:nvSpPr>
-        <p:spPr>
-          <a:xfrm>
-            <a:off x="1828800" y="4023360"/>
-            <a:ext cx="8503920" cy="411480"/>
-          </a:xfrm>
-          <a:prstGeom prst="rect">
-            <a:avLst/>
-          </a:prstGeom>
-          <a:noFill/>
-        </p:spPr>
-        <p:txBody>
-          <a:bodyPr wrap="square">
-            <a:spAutoFit/>
-          </a:bodyPr>
-          <a:lstStyle/>
-          <a:p>
-            <a:pPr algn="ctr"/>
-            <a:r>
-              <a:rPr sz="1200" b="0">
-                <a:solidFill>
-                  <a:srgbClr val="406090"/>
-                </a:solidFill>
-              </a:rPr>
-              <a:t>Slack 파일 ID: F0B0BMR67H9</a:t>
-            </a:r>
-          </a:p>
-        </p:txBody>
-      </p:sp>
-      <p:sp>
-        <p:nvSpPr>
-          <p:cNvPr id="9" name="TextBox 8"/>
-          <p:cNvSpPr txBox="1"/>
-          <p:nvPr/>
-        </p:nvSpPr>
-        <p:spPr>
-          <a:xfrm>
-            <a:off x="1371600" y="4572000"/>
-            <a:ext cx="9418320" cy="411480"/>
-          </a:xfrm>
-          <a:prstGeom prst="rect">
-            <a:avLst/>
-          </a:prstGeom>
-          <a:noFill/>
-        </p:spPr>
-        <p:txBody>
-          <a:bodyPr wrap="square">
-            <a:spAutoFit/>
-          </a:bodyPr>
-          <a:lstStyle/>
-          <a:p>
-            <a:pPr algn="ctr"/>
-            <a:r>
-              <a:rPr sz="1100" b="0">
-                <a:solidFill>
-                  <a:srgbClr val="888888"/>
-                </a:solidFill>
-              </a:rPr>
-              <a:t>※ pipeline.py 실행 시 실제 사진으로 교체됩니다 (SLACK_BOT_TOKEN 필요)</a:t>
-            </a:r>
-          </a:p>
-        </p:txBody>
-      </p:sp>
-      <p:sp>
-        <p:nvSpPr>
-          <p:cNvPr id="10" name="Rectangle 9"/>
           <p:cNvSpPr/>
           <p:nvPr/>
         </p:nvSpPr>
@@ -3919,7 +3723,7 @@
       </p:sp>
       <p:sp>
         <p:nvSpPr>
-          <p:cNvPr id="11" name="TextBox 10"/>
+          <p:cNvPr id="6" name="TextBox 5"/>
           <p:cNvSpPr txBox="1"/>
           <p:nvPr/>
         </p:nvSpPr>
@@ -3946,7 +3750,415 @@
                   <a:srgbClr val="E0E8F5"/>
                 </a:solidFill>
               </a:rPr>
-              <a:t>BCS 스터디 인증 · 2026년 4월 · #스터디-mgc</a:t>
+              <a:t>BCS 스터디 인증 · 2026년 4월 · 4월 14일</a:t>
+            </a:r>
+          </a:p>
+        </p:txBody>
+      </p:sp>
+    </p:spTree>
+  </p:cSld>
+  <p:clrMapOvr>
+    <a:masterClrMapping/>
+  </p:clrMapOvr>
+</p:sld>
+</file>
+
+<file path=ppt/slides/slide11.xml><?xml version="1.0" encoding="utf-8"?>
+<p:sld xmlns:a="http://schemas.openxmlformats.org/drawingml/2006/main" xmlns:p="http://schemas.openxmlformats.org/presentationml/2006/main" xmlns:r="http://schemas.openxmlformats.org/officeDocument/2006/relationships">
+  <p:cSld>
+    <p:bg>
+      <p:bgPr>
+        <a:solidFill>
+          <a:srgbClr val="1A1A2E"/>
+        </a:solidFill>
+        <a:effectLst/>
+      </p:bgPr>
+    </p:bg>
+    <p:spTree>
+      <p:nvGrpSpPr>
+        <p:cNvPr id="1" name=""/>
+        <p:cNvGrpSpPr/>
+        <p:nvPr/>
+      </p:nvGrpSpPr>
+      <p:grpSpPr/>
+      <p:sp>
+        <p:nvSpPr>
+          <p:cNvPr id="2" name="Rectangle 1"/>
+          <p:cNvSpPr/>
+          <p:nvPr/>
+        </p:nvSpPr>
+        <p:spPr>
+          <a:xfrm>
+            <a:off x="0" y="0"/>
+            <a:ext cx="12188952" cy="64008"/>
+          </a:xfrm>
+          <a:prstGeom prst="rect">
+            <a:avLst/>
+          </a:prstGeom>
+          <a:solidFill>
+            <a:srgbClr val="FFD700"/>
+          </a:solidFill>
+          <a:ln>
+            <a:noFill/>
+          </a:ln>
+        </p:spPr>
+        <p:style>
+          <a:lnRef idx="1">
+            <a:schemeClr val="accent1"/>
+          </a:lnRef>
+          <a:fillRef idx="3">
+            <a:schemeClr val="accent1"/>
+          </a:fillRef>
+          <a:effectRef idx="2">
+            <a:schemeClr val="accent1"/>
+          </a:effectRef>
+          <a:fontRef idx="minor">
+            <a:schemeClr val="lt1"/>
+          </a:fontRef>
+        </p:style>
+        <p:txBody>
+          <a:bodyPr rtlCol="0" anchor="ctr"/>
+          <a:lstStyle/>
+          <a:p>
+            <a:pPr algn="ctr"/>
+          </a:p>
+        </p:txBody>
+      </p:sp>
+      <p:sp>
+        <p:nvSpPr>
+          <p:cNvPr id="3" name="TextBox 2"/>
+          <p:cNvSpPr txBox="1"/>
+          <p:nvPr/>
+        </p:nvSpPr>
+        <p:spPr>
+          <a:xfrm>
+            <a:off x="457200" y="109728"/>
+            <a:ext cx="10972800" cy="594360"/>
+          </a:xfrm>
+          <a:prstGeom prst="rect">
+            <a:avLst/>
+          </a:prstGeom>
+          <a:noFill/>
+        </p:spPr>
+        <p:txBody>
+          <a:bodyPr wrap="square">
+            <a:spAutoFit/>
+          </a:bodyPr>
+          <a:lstStyle/>
+          <a:p>
+            <a:pPr algn="l"/>
+            <a:r>
+              <a:rPr sz="2400" b="1">
+                <a:solidFill>
+                  <a:srgbClr val="FFD700"/>
+                </a:solidFill>
+              </a:rPr>
+              <a:t>📸 스터디 인증 사진 (3/4) · 4월 21일</a:t>
+            </a:r>
+          </a:p>
+        </p:txBody>
+      </p:sp>
+      <p:pic>
+        <p:nvPicPr>
+          <p:cNvPr id="4" name="Picture 3" descr="0421.jpg"/>
+          <p:cNvPicPr>
+            <a:picLocks noChangeAspect="1"/>
+          </p:cNvPicPr>
+          <p:nvPr/>
+        </p:nvPicPr>
+        <p:blipFill>
+          <a:blip r:embed="rId2"/>
+          <a:stretch>
+            <a:fillRect/>
+          </a:stretch>
+        </p:blipFill>
+        <p:spPr>
+          <a:xfrm>
+            <a:off x="1305745" y="914400"/>
+            <a:ext cx="9577462" cy="5303520"/>
+          </a:xfrm>
+          <a:prstGeom prst="rect">
+            <a:avLst/>
+          </a:prstGeom>
+        </p:spPr>
+      </p:pic>
+      <p:sp>
+        <p:nvSpPr>
+          <p:cNvPr id="5" name="Rectangle 4"/>
+          <p:cNvSpPr/>
+          <p:nvPr/>
+        </p:nvSpPr>
+        <p:spPr>
+          <a:xfrm>
+            <a:off x="0" y="6446520"/>
+            <a:ext cx="12188952" cy="411480"/>
+          </a:xfrm>
+          <a:prstGeom prst="rect">
+            <a:avLst/>
+          </a:prstGeom>
+          <a:solidFill>
+            <a:srgbClr val="0F3A71"/>
+          </a:solidFill>
+          <a:ln>
+            <a:noFill/>
+          </a:ln>
+        </p:spPr>
+        <p:style>
+          <a:lnRef idx="1">
+            <a:schemeClr val="accent1"/>
+          </a:lnRef>
+          <a:fillRef idx="3">
+            <a:schemeClr val="accent1"/>
+          </a:fillRef>
+          <a:effectRef idx="2">
+            <a:schemeClr val="accent1"/>
+          </a:effectRef>
+          <a:fontRef idx="minor">
+            <a:schemeClr val="lt1"/>
+          </a:fontRef>
+        </p:style>
+        <p:txBody>
+          <a:bodyPr rtlCol="0" anchor="ctr"/>
+          <a:lstStyle/>
+          <a:p>
+            <a:pPr algn="ctr"/>
+          </a:p>
+        </p:txBody>
+      </p:sp>
+      <p:sp>
+        <p:nvSpPr>
+          <p:cNvPr id="6" name="TextBox 5"/>
+          <p:cNvSpPr txBox="1"/>
+          <p:nvPr/>
+        </p:nvSpPr>
+        <p:spPr>
+          <a:xfrm>
+            <a:off x="457200" y="6473952"/>
+            <a:ext cx="11247120" cy="320040"/>
+          </a:xfrm>
+          <a:prstGeom prst="rect">
+            <a:avLst/>
+          </a:prstGeom>
+          <a:noFill/>
+        </p:spPr>
+        <p:txBody>
+          <a:bodyPr wrap="square">
+            <a:spAutoFit/>
+          </a:bodyPr>
+          <a:lstStyle/>
+          <a:p>
+            <a:pPr algn="ctr"/>
+            <a:r>
+              <a:rPr sz="1100" b="0">
+                <a:solidFill>
+                  <a:srgbClr val="E0E8F5"/>
+                </a:solidFill>
+              </a:rPr>
+              <a:t>BCS 스터디 인증 · 2026년 4월 · 4월 21일</a:t>
+            </a:r>
+          </a:p>
+        </p:txBody>
+      </p:sp>
+    </p:spTree>
+  </p:cSld>
+  <p:clrMapOvr>
+    <a:masterClrMapping/>
+  </p:clrMapOvr>
+</p:sld>
+</file>
+
+<file path=ppt/slides/slide12.xml><?xml version="1.0" encoding="utf-8"?>
+<p:sld xmlns:a="http://schemas.openxmlformats.org/drawingml/2006/main" xmlns:p="http://schemas.openxmlformats.org/presentationml/2006/main" xmlns:r="http://schemas.openxmlformats.org/officeDocument/2006/relationships">
+  <p:cSld>
+    <p:bg>
+      <p:bgPr>
+        <a:solidFill>
+          <a:srgbClr val="1A1A2E"/>
+        </a:solidFill>
+        <a:effectLst/>
+      </p:bgPr>
+    </p:bg>
+    <p:spTree>
+      <p:nvGrpSpPr>
+        <p:cNvPr id="1" name=""/>
+        <p:cNvGrpSpPr/>
+        <p:nvPr/>
+      </p:nvGrpSpPr>
+      <p:grpSpPr/>
+      <p:sp>
+        <p:nvSpPr>
+          <p:cNvPr id="2" name="Rectangle 1"/>
+          <p:cNvSpPr/>
+          <p:nvPr/>
+        </p:nvSpPr>
+        <p:spPr>
+          <a:xfrm>
+            <a:off x="0" y="0"/>
+            <a:ext cx="12188952" cy="64008"/>
+          </a:xfrm>
+          <a:prstGeom prst="rect">
+            <a:avLst/>
+          </a:prstGeom>
+          <a:solidFill>
+            <a:srgbClr val="FFD700"/>
+          </a:solidFill>
+          <a:ln>
+            <a:noFill/>
+          </a:ln>
+        </p:spPr>
+        <p:style>
+          <a:lnRef idx="1">
+            <a:schemeClr val="accent1"/>
+          </a:lnRef>
+          <a:fillRef idx="3">
+            <a:schemeClr val="accent1"/>
+          </a:fillRef>
+          <a:effectRef idx="2">
+            <a:schemeClr val="accent1"/>
+          </a:effectRef>
+          <a:fontRef idx="minor">
+            <a:schemeClr val="lt1"/>
+          </a:fontRef>
+        </p:style>
+        <p:txBody>
+          <a:bodyPr rtlCol="0" anchor="ctr"/>
+          <a:lstStyle/>
+          <a:p>
+            <a:pPr algn="ctr"/>
+          </a:p>
+        </p:txBody>
+      </p:sp>
+      <p:sp>
+        <p:nvSpPr>
+          <p:cNvPr id="3" name="TextBox 2"/>
+          <p:cNvSpPr txBox="1"/>
+          <p:nvPr/>
+        </p:nvSpPr>
+        <p:spPr>
+          <a:xfrm>
+            <a:off x="457200" y="109728"/>
+            <a:ext cx="10972800" cy="594360"/>
+          </a:xfrm>
+          <a:prstGeom prst="rect">
+            <a:avLst/>
+          </a:prstGeom>
+          <a:noFill/>
+        </p:spPr>
+        <p:txBody>
+          <a:bodyPr wrap="square">
+            <a:spAutoFit/>
+          </a:bodyPr>
+          <a:lstStyle/>
+          <a:p>
+            <a:pPr algn="l"/>
+            <a:r>
+              <a:rPr sz="2400" b="1">
+                <a:solidFill>
+                  <a:srgbClr val="FFD700"/>
+                </a:solidFill>
+              </a:rPr>
+              <a:t>📸 스터디 인증 사진 (4/4) · 4월 29일</a:t>
+            </a:r>
+          </a:p>
+        </p:txBody>
+      </p:sp>
+      <p:pic>
+        <p:nvPicPr>
+          <p:cNvPr id="4" name="Picture 3" descr="0429.jpg"/>
+          <p:cNvPicPr>
+            <a:picLocks noChangeAspect="1"/>
+          </p:cNvPicPr>
+          <p:nvPr/>
+        </p:nvPicPr>
+        <p:blipFill>
+          <a:blip r:embed="rId2"/>
+          <a:stretch>
+            <a:fillRect/>
+          </a:stretch>
+        </p:blipFill>
+        <p:spPr>
+          <a:xfrm>
+            <a:off x="836676" y="914400"/>
+            <a:ext cx="10515600" cy="4830603"/>
+          </a:xfrm>
+          <a:prstGeom prst="rect">
+            <a:avLst/>
+          </a:prstGeom>
+        </p:spPr>
+      </p:pic>
+      <p:sp>
+        <p:nvSpPr>
+          <p:cNvPr id="5" name="Rectangle 4"/>
+          <p:cNvSpPr/>
+          <p:nvPr/>
+        </p:nvSpPr>
+        <p:spPr>
+          <a:xfrm>
+            <a:off x="0" y="6446520"/>
+            <a:ext cx="12188952" cy="411480"/>
+          </a:xfrm>
+          <a:prstGeom prst="rect">
+            <a:avLst/>
+          </a:prstGeom>
+          <a:solidFill>
+            <a:srgbClr val="0F3A71"/>
+          </a:solidFill>
+          <a:ln>
+            <a:noFill/>
+          </a:ln>
+        </p:spPr>
+        <p:style>
+          <a:lnRef idx="1">
+            <a:schemeClr val="accent1"/>
+          </a:lnRef>
+          <a:fillRef idx="3">
+            <a:schemeClr val="accent1"/>
+          </a:fillRef>
+          <a:effectRef idx="2">
+            <a:schemeClr val="accent1"/>
+          </a:effectRef>
+          <a:fontRef idx="minor">
+            <a:schemeClr val="lt1"/>
+          </a:fontRef>
+        </p:style>
+        <p:txBody>
+          <a:bodyPr rtlCol="0" anchor="ctr"/>
+          <a:lstStyle/>
+          <a:p>
+            <a:pPr algn="ctr"/>
+          </a:p>
+        </p:txBody>
+      </p:sp>
+      <p:sp>
+        <p:nvSpPr>
+          <p:cNvPr id="6" name="TextBox 5"/>
+          <p:cNvSpPr txBox="1"/>
+          <p:nvPr/>
+        </p:nvSpPr>
+        <p:spPr>
+          <a:xfrm>
+            <a:off x="457200" y="6473952"/>
+            <a:ext cx="11247120" cy="320040"/>
+          </a:xfrm>
+          <a:prstGeom prst="rect">
+            <a:avLst/>
+          </a:prstGeom>
+          <a:noFill/>
+        </p:spPr>
+        <p:txBody>
+          <a:bodyPr wrap="square">
+            <a:spAutoFit/>
+          </a:bodyPr>
+          <a:lstStyle/>
+          <a:p>
+            <a:pPr algn="ctr"/>
+            <a:r>
+              <a:rPr sz="1100" b="0">
+                <a:solidFill>
+                  <a:srgbClr val="E0E8F5"/>
+                </a:solidFill>
+              </a:rPr>
+              <a:t>BCS 스터디 인증 · 2026년 4월 · 4월 29일</a:t>
             </a:r>
           </a:p>
         </p:txBody>
@@ -12337,236 +12549,38 @@
                   <a:srgbClr val="FFD700"/>
                 </a:solidFill>
               </a:rPr>
-              <a:t>📸 스터디 인증 사진 (1/2) · 4월 21일</a:t>
-            </a:r>
-          </a:p>
-        </p:txBody>
-      </p:sp>
-      <p:sp>
-        <p:nvSpPr>
-          <p:cNvPr id="4" name="Rectangle 3"/>
-          <p:cNvSpPr/>
-          <p:nvPr/>
-        </p:nvSpPr>
-        <p:spPr>
-          <a:xfrm>
-            <a:off x="1371600" y="868680"/>
-            <a:ext cx="9418320" cy="5303520"/>
-          </a:xfrm>
-          <a:prstGeom prst="rect">
-            <a:avLst/>
-          </a:prstGeom>
-          <a:solidFill>
-            <a:srgbClr val="0A1528"/>
-          </a:solidFill>
-          <a:ln>
-            <a:noFill/>
-          </a:ln>
-        </p:spPr>
-        <p:style>
-          <a:lnRef idx="1">
-            <a:schemeClr val="accent1"/>
-          </a:lnRef>
-          <a:fillRef idx="3">
-            <a:schemeClr val="accent1"/>
-          </a:fillRef>
-          <a:effectRef idx="2">
-            <a:schemeClr val="accent1"/>
-          </a:effectRef>
-          <a:fontRef idx="minor">
-            <a:schemeClr val="lt1"/>
-          </a:fontRef>
-        </p:style>
-        <p:txBody>
-          <a:bodyPr rtlCol="0" anchor="ctr"/>
-          <a:lstStyle/>
-          <a:p>
-            <a:pPr algn="ctr"/>
-          </a:p>
-        </p:txBody>
-      </p:sp>
+              <a:t>📸 스터디 인증 사진 (1/4) · 4월 7일</a:t>
+            </a:r>
+          </a:p>
+        </p:txBody>
+      </p:sp>
+      <p:pic>
+        <p:nvPicPr>
+          <p:cNvPr id="4" name="Picture 3" descr="0407.jpg"/>
+          <p:cNvPicPr>
+            <a:picLocks noChangeAspect="1"/>
+          </p:cNvPicPr>
+          <p:nvPr/>
+        </p:nvPicPr>
+        <p:blipFill>
+          <a:blip r:embed="rId2"/>
+          <a:stretch>
+            <a:fillRect/>
+          </a:stretch>
+        </p:blipFill>
+        <p:spPr>
+          <a:xfrm>
+            <a:off x="2797805" y="914400"/>
+            <a:ext cx="6593342" cy="5303520"/>
+          </a:xfrm>
+          <a:prstGeom prst="rect">
+            <a:avLst/>
+          </a:prstGeom>
+        </p:spPr>
+      </p:pic>
       <p:sp>
         <p:nvSpPr>
           <p:cNvPr id="5" name="Rectangle 4"/>
-          <p:cNvSpPr/>
-          <p:nvPr/>
-        </p:nvSpPr>
-        <p:spPr>
-          <a:xfrm>
-            <a:off x="1417320" y="914400"/>
-            <a:ext cx="9326880" cy="5212080"/>
-          </a:xfrm>
-          <a:prstGeom prst="rect">
-            <a:avLst/>
-          </a:prstGeom>
-          <a:noFill/>
-          <a:ln w="25400">
-            <a:solidFill>
-              <a:srgbClr val="305080"/>
-            </a:solidFill>
-          </a:ln>
-        </p:spPr>
-        <p:style>
-          <a:lnRef idx="1">
-            <a:schemeClr val="accent1"/>
-          </a:lnRef>
-          <a:fillRef idx="3">
-            <a:schemeClr val="accent1"/>
-          </a:fillRef>
-          <a:effectRef idx="2">
-            <a:schemeClr val="accent1"/>
-          </a:effectRef>
-          <a:fontRef idx="minor">
-            <a:schemeClr val="lt1"/>
-          </a:fontRef>
-        </p:style>
-        <p:txBody>
-          <a:bodyPr rtlCol="0" anchor="ctr"/>
-          <a:lstStyle/>
-          <a:p>
-            <a:pPr algn="ctr"/>
-          </a:p>
-        </p:txBody>
-      </p:sp>
-      <p:sp>
-        <p:nvSpPr>
-          <p:cNvPr id="6" name="TextBox 5"/>
-          <p:cNvSpPr txBox="1"/>
-          <p:nvPr/>
-        </p:nvSpPr>
-        <p:spPr>
-          <a:xfrm>
-            <a:off x="5212080" y="2103120"/>
-            <a:ext cx="1828800" cy="1371600"/>
-          </a:xfrm>
-          <a:prstGeom prst="rect">
-            <a:avLst/>
-          </a:prstGeom>
-          <a:noFill/>
-        </p:spPr>
-        <p:txBody>
-          <a:bodyPr wrap="square">
-            <a:spAutoFit/>
-          </a:bodyPr>
-          <a:lstStyle/>
-          <a:p>
-            <a:pPr algn="ctr"/>
-            <a:r>
-              <a:rPr sz="6000" b="0">
-                <a:solidFill>
-                  <a:srgbClr val="305080"/>
-                </a:solidFill>
-              </a:rPr>
-              <a:t>📷</a:t>
-            </a:r>
-          </a:p>
-        </p:txBody>
-      </p:sp>
-      <p:sp>
-        <p:nvSpPr>
-          <p:cNvPr id="7" name="TextBox 6"/>
-          <p:cNvSpPr txBox="1"/>
-          <p:nvPr/>
-        </p:nvSpPr>
-        <p:spPr>
-          <a:xfrm>
-            <a:off x="1828800" y="3474720"/>
-            <a:ext cx="8503920" cy="548640"/>
-          </a:xfrm>
-          <a:prstGeom prst="rect">
-            <a:avLst/>
-          </a:prstGeom>
-          <a:noFill/>
-        </p:spPr>
-        <p:txBody>
-          <a:bodyPr wrap="square">
-            <a:spAutoFit/>
-          </a:bodyPr>
-          <a:lstStyle/>
-          <a:p>
-            <a:pPr algn="ctr"/>
-            <a:r>
-              <a:rPr sz="1800" b="0">
-                <a:solidFill>
-                  <a:srgbClr val="5070A0"/>
-                </a:solidFill>
-              </a:rPr>
-              <a:t>스터디 인증 사진 · 4월 21일</a:t>
-            </a:r>
-          </a:p>
-        </p:txBody>
-      </p:sp>
-      <p:sp>
-        <p:nvSpPr>
-          <p:cNvPr id="8" name="TextBox 7"/>
-          <p:cNvSpPr txBox="1"/>
-          <p:nvPr/>
-        </p:nvSpPr>
-        <p:spPr>
-          <a:xfrm>
-            <a:off x="1828800" y="4023360"/>
-            <a:ext cx="8503920" cy="411480"/>
-          </a:xfrm>
-          <a:prstGeom prst="rect">
-            <a:avLst/>
-          </a:prstGeom>
-          <a:noFill/>
-        </p:spPr>
-        <p:txBody>
-          <a:bodyPr wrap="square">
-            <a:spAutoFit/>
-          </a:bodyPr>
-          <a:lstStyle/>
-          <a:p>
-            <a:pPr algn="ctr"/>
-            <a:r>
-              <a:rPr sz="1200" b="0">
-                <a:solidFill>
-                  <a:srgbClr val="406090"/>
-                </a:solidFill>
-              </a:rPr>
-              <a:t>Slack 파일 ID: F0AU542SECE</a:t>
-            </a:r>
-          </a:p>
-        </p:txBody>
-      </p:sp>
-      <p:sp>
-        <p:nvSpPr>
-          <p:cNvPr id="9" name="TextBox 8"/>
-          <p:cNvSpPr txBox="1"/>
-          <p:nvPr/>
-        </p:nvSpPr>
-        <p:spPr>
-          <a:xfrm>
-            <a:off x="1371600" y="4572000"/>
-            <a:ext cx="9418320" cy="411480"/>
-          </a:xfrm>
-          <a:prstGeom prst="rect">
-            <a:avLst/>
-          </a:prstGeom>
-          <a:noFill/>
-        </p:spPr>
-        <p:txBody>
-          <a:bodyPr wrap="square">
-            <a:spAutoFit/>
-          </a:bodyPr>
-          <a:lstStyle/>
-          <a:p>
-            <a:pPr algn="ctr"/>
-            <a:r>
-              <a:rPr sz="1100" b="0">
-                <a:solidFill>
-                  <a:srgbClr val="888888"/>
-                </a:solidFill>
-              </a:rPr>
-              <a:t>※ pipeline.py 실행 시 실제 사진으로 교체됩니다 (SLACK_BOT_TOKEN 필요)</a:t>
-            </a:r>
-          </a:p>
-        </p:txBody>
-      </p:sp>
-      <p:sp>
-        <p:nvSpPr>
-          <p:cNvPr id="10" name="Rectangle 9"/>
           <p:cNvSpPr/>
           <p:nvPr/>
         </p:nvSpPr>
@@ -12609,7 +12623,7 @@
       </p:sp>
       <p:sp>
         <p:nvSpPr>
-          <p:cNvPr id="11" name="TextBox 10"/>
+          <p:cNvPr id="6" name="TextBox 5"/>
           <p:cNvSpPr txBox="1"/>
           <p:nvPr/>
         </p:nvSpPr>
@@ -12636,7 +12650,7 @@
                   <a:srgbClr val="E0E8F5"/>
                 </a:solidFill>
               </a:rPr>
-              <a:t>BCS 스터디 인증 · 2026년 4월 · #스터디-mgc</a:t>
+              <a:t>BCS 스터디 인증 · 2026년 4월 · 4월 7일</a:t>
             </a:r>
           </a:p>
         </p:txBody>

--- a/2604/바코스_스터디_2604.pptx
+++ b/2604/바코스_스터디_2604.pptx
@@ -16,7 +16,6 @@
     <p:sldId id="264" r:id="rId15"/>
     <p:sldId id="265" r:id="rId16"/>
     <p:sldId id="266" r:id="rId17"/>
-    <p:sldId id="267" r:id="rId18"/>
   </p:sldIdLst>
   <p:sldSz cx="12188952" cy="6858000" type="screen4x3"/>
   <p:notesSz cx="6858000" cy="9144000"/>
@@ -3649,14 +3648,14 @@
                   <a:srgbClr val="FFD700"/>
                 </a:solidFill>
               </a:rPr>
-              <a:t>📸 스터디 인증 사진 (2/4) · 4월 14일</a:t>
+              <a:t>📸 스터디 인증 사진 (3/4) · 4월 21일</a:t>
             </a:r>
           </a:p>
         </p:txBody>
       </p:sp>
       <p:pic>
         <p:nvPicPr>
-          <p:cNvPr id="4" name="Picture 3" descr="0414.jpg"/>
+          <p:cNvPr id="4" name="Picture 3" descr="0421.jpg"/>
           <p:cNvPicPr>
             <a:picLocks noChangeAspect="1"/>
           </p:cNvPicPr>
@@ -3670,8 +3669,8 @@
         </p:blipFill>
         <p:spPr>
           <a:xfrm>
-            <a:off x="2034365" y="914400"/>
-            <a:ext cx="8120222" cy="5303520"/>
+            <a:off x="1305745" y="914400"/>
+            <a:ext cx="9577462" cy="5303520"/>
           </a:xfrm>
           <a:prstGeom prst="rect">
             <a:avLst/>
@@ -3750,7 +3749,7 @@
                   <a:srgbClr val="E0E8F5"/>
                 </a:solidFill>
               </a:rPr>
-              <a:t>BCS 스터디 인증 · 2026년 4월 · 4월 14일</a:t>
+              <a:t>BCS 스터디 인증 · 2026년 4월 · 4월 21일</a:t>
             </a:r>
           </a:p>
         </p:txBody>
@@ -3853,210 +3852,6 @@
                   <a:srgbClr val="FFD700"/>
                 </a:solidFill>
               </a:rPr>
-              <a:t>📸 스터디 인증 사진 (3/4) · 4월 21일</a:t>
-            </a:r>
-          </a:p>
-        </p:txBody>
-      </p:sp>
-      <p:pic>
-        <p:nvPicPr>
-          <p:cNvPr id="4" name="Picture 3" descr="0421.jpg"/>
-          <p:cNvPicPr>
-            <a:picLocks noChangeAspect="1"/>
-          </p:cNvPicPr>
-          <p:nvPr/>
-        </p:nvPicPr>
-        <p:blipFill>
-          <a:blip r:embed="rId2"/>
-          <a:stretch>
-            <a:fillRect/>
-          </a:stretch>
-        </p:blipFill>
-        <p:spPr>
-          <a:xfrm>
-            <a:off x="1305745" y="914400"/>
-            <a:ext cx="9577462" cy="5303520"/>
-          </a:xfrm>
-          <a:prstGeom prst="rect">
-            <a:avLst/>
-          </a:prstGeom>
-        </p:spPr>
-      </p:pic>
-      <p:sp>
-        <p:nvSpPr>
-          <p:cNvPr id="5" name="Rectangle 4"/>
-          <p:cNvSpPr/>
-          <p:nvPr/>
-        </p:nvSpPr>
-        <p:spPr>
-          <a:xfrm>
-            <a:off x="0" y="6446520"/>
-            <a:ext cx="12188952" cy="411480"/>
-          </a:xfrm>
-          <a:prstGeom prst="rect">
-            <a:avLst/>
-          </a:prstGeom>
-          <a:solidFill>
-            <a:srgbClr val="0F3A71"/>
-          </a:solidFill>
-          <a:ln>
-            <a:noFill/>
-          </a:ln>
-        </p:spPr>
-        <p:style>
-          <a:lnRef idx="1">
-            <a:schemeClr val="accent1"/>
-          </a:lnRef>
-          <a:fillRef idx="3">
-            <a:schemeClr val="accent1"/>
-          </a:fillRef>
-          <a:effectRef idx="2">
-            <a:schemeClr val="accent1"/>
-          </a:effectRef>
-          <a:fontRef idx="minor">
-            <a:schemeClr val="lt1"/>
-          </a:fontRef>
-        </p:style>
-        <p:txBody>
-          <a:bodyPr rtlCol="0" anchor="ctr"/>
-          <a:lstStyle/>
-          <a:p>
-            <a:pPr algn="ctr"/>
-          </a:p>
-        </p:txBody>
-      </p:sp>
-      <p:sp>
-        <p:nvSpPr>
-          <p:cNvPr id="6" name="TextBox 5"/>
-          <p:cNvSpPr txBox="1"/>
-          <p:nvPr/>
-        </p:nvSpPr>
-        <p:spPr>
-          <a:xfrm>
-            <a:off x="457200" y="6473952"/>
-            <a:ext cx="11247120" cy="320040"/>
-          </a:xfrm>
-          <a:prstGeom prst="rect">
-            <a:avLst/>
-          </a:prstGeom>
-          <a:noFill/>
-        </p:spPr>
-        <p:txBody>
-          <a:bodyPr wrap="square">
-            <a:spAutoFit/>
-          </a:bodyPr>
-          <a:lstStyle/>
-          <a:p>
-            <a:pPr algn="ctr"/>
-            <a:r>
-              <a:rPr sz="1100" b="0">
-                <a:solidFill>
-                  <a:srgbClr val="E0E8F5"/>
-                </a:solidFill>
-              </a:rPr>
-              <a:t>BCS 스터디 인증 · 2026년 4월 · 4월 21일</a:t>
-            </a:r>
-          </a:p>
-        </p:txBody>
-      </p:sp>
-    </p:spTree>
-  </p:cSld>
-  <p:clrMapOvr>
-    <a:masterClrMapping/>
-  </p:clrMapOvr>
-</p:sld>
-</file>
-
-<file path=ppt/slides/slide12.xml><?xml version="1.0" encoding="utf-8"?>
-<p:sld xmlns:a="http://schemas.openxmlformats.org/drawingml/2006/main" xmlns:p="http://schemas.openxmlformats.org/presentationml/2006/main" xmlns:r="http://schemas.openxmlformats.org/officeDocument/2006/relationships">
-  <p:cSld>
-    <p:bg>
-      <p:bgPr>
-        <a:solidFill>
-          <a:srgbClr val="1A1A2E"/>
-        </a:solidFill>
-        <a:effectLst/>
-      </p:bgPr>
-    </p:bg>
-    <p:spTree>
-      <p:nvGrpSpPr>
-        <p:cNvPr id="1" name=""/>
-        <p:cNvGrpSpPr/>
-        <p:nvPr/>
-      </p:nvGrpSpPr>
-      <p:grpSpPr/>
-      <p:sp>
-        <p:nvSpPr>
-          <p:cNvPr id="2" name="Rectangle 1"/>
-          <p:cNvSpPr/>
-          <p:nvPr/>
-        </p:nvSpPr>
-        <p:spPr>
-          <a:xfrm>
-            <a:off x="0" y="0"/>
-            <a:ext cx="12188952" cy="64008"/>
-          </a:xfrm>
-          <a:prstGeom prst="rect">
-            <a:avLst/>
-          </a:prstGeom>
-          <a:solidFill>
-            <a:srgbClr val="FFD700"/>
-          </a:solidFill>
-          <a:ln>
-            <a:noFill/>
-          </a:ln>
-        </p:spPr>
-        <p:style>
-          <a:lnRef idx="1">
-            <a:schemeClr val="accent1"/>
-          </a:lnRef>
-          <a:fillRef idx="3">
-            <a:schemeClr val="accent1"/>
-          </a:fillRef>
-          <a:effectRef idx="2">
-            <a:schemeClr val="accent1"/>
-          </a:effectRef>
-          <a:fontRef idx="minor">
-            <a:schemeClr val="lt1"/>
-          </a:fontRef>
-        </p:style>
-        <p:txBody>
-          <a:bodyPr rtlCol="0" anchor="ctr"/>
-          <a:lstStyle/>
-          <a:p>
-            <a:pPr algn="ctr"/>
-          </a:p>
-        </p:txBody>
-      </p:sp>
-      <p:sp>
-        <p:nvSpPr>
-          <p:cNvPr id="3" name="TextBox 2"/>
-          <p:cNvSpPr txBox="1"/>
-          <p:nvPr/>
-        </p:nvSpPr>
-        <p:spPr>
-          <a:xfrm>
-            <a:off x="457200" y="109728"/>
-            <a:ext cx="10972800" cy="594360"/>
-          </a:xfrm>
-          <a:prstGeom prst="rect">
-            <a:avLst/>
-          </a:prstGeom>
-          <a:noFill/>
-        </p:spPr>
-        <p:txBody>
-          <a:bodyPr wrap="square">
-            <a:spAutoFit/>
-          </a:bodyPr>
-          <a:lstStyle/>
-          <a:p>
-            <a:pPr algn="l"/>
-            <a:r>
-              <a:rPr sz="2400" b="1">
-                <a:solidFill>
-                  <a:srgbClr val="FFD700"/>
-                </a:solidFill>
-              </a:rPr>
               <a:t>📸 스터디 인증 사진 (4/4) · 4월 29일</a:t>
             </a:r>
           </a:p>
@@ -5397,7 +5192,7 @@
                   <a:srgbClr val="FFFFFF"/>
                 </a:solidFill>
               </a:rPr>
-              <a:t>▪ 이번주 진행 내용</a:t>
+              <a:t>▪ 진행 내용 (회의록)</a:t>
             </a:r>
           </a:p>
         </p:txBody>
@@ -5411,7 +5206,7 @@
         <p:spPr>
           <a:xfrm>
             <a:off x="457200" y="1261872"/>
-            <a:ext cx="7040880" cy="457200"/>
+            <a:ext cx="7040880" cy="347472"/>
           </a:xfrm>
           <a:prstGeom prst="rect">
             <a:avLst/>
@@ -5453,8 +5248,8 @@
         </p:nvSpPr>
         <p:spPr>
           <a:xfrm>
-            <a:off x="566928" y="1325880"/>
-            <a:ext cx="1554480" cy="402336"/>
+            <a:off x="566928" y="1307592"/>
+            <a:ext cx="1554480" cy="310896"/>
           </a:xfrm>
           <a:prstGeom prst="rect">
             <a:avLst/>
@@ -5469,7 +5264,7 @@
           <a:p>
             <a:pPr algn="l"/>
             <a:r>
-              <a:rPr sz="1200" b="1">
+              <a:rPr sz="1100" b="1">
                 <a:solidFill>
                   <a:srgbClr val="FFD700"/>
                 </a:solidFill>
@@ -5487,8 +5282,8 @@
         </p:nvSpPr>
         <p:spPr>
           <a:xfrm>
-            <a:off x="2240280" y="1325880"/>
-            <a:ext cx="5120640" cy="402336"/>
+            <a:off x="2240280" y="1307592"/>
+            <a:ext cx="5120640" cy="310896"/>
           </a:xfrm>
           <a:prstGeom prst="rect">
             <a:avLst/>
@@ -5503,7 +5298,7 @@
           <a:p>
             <a:pPr algn="l"/>
             <a:r>
-              <a:rPr sz="1100" b="0">
+              <a:rPr sz="1000" b="0">
                 <a:solidFill>
                   <a:srgbClr val="FFFFFF"/>
                 </a:solidFill>
@@ -5521,8 +5316,8 @@
         </p:nvSpPr>
         <p:spPr>
           <a:xfrm>
-            <a:off x="457200" y="1755648"/>
-            <a:ext cx="7040880" cy="457200"/>
+            <a:off x="457200" y="1645920"/>
+            <a:ext cx="7040880" cy="347472"/>
           </a:xfrm>
           <a:prstGeom prst="rect">
             <a:avLst/>
@@ -5564,8 +5359,8 @@
         </p:nvSpPr>
         <p:spPr>
           <a:xfrm>
-            <a:off x="566928" y="1819656"/>
-            <a:ext cx="1554480" cy="402336"/>
+            <a:off x="566928" y="1691640"/>
+            <a:ext cx="1554480" cy="310896"/>
           </a:xfrm>
           <a:prstGeom prst="rect">
             <a:avLst/>
@@ -5580,7 +5375,7 @@
           <a:p>
             <a:pPr algn="l"/>
             <a:r>
-              <a:rPr sz="1200" b="1">
+              <a:rPr sz="1100" b="1">
                 <a:solidFill>
                   <a:srgbClr val="FFD700"/>
                 </a:solidFill>
@@ -5598,8 +5393,8 @@
         </p:nvSpPr>
         <p:spPr>
           <a:xfrm>
-            <a:off x="2240280" y="1819656"/>
-            <a:ext cx="5120640" cy="402336"/>
+            <a:off x="2240280" y="1691640"/>
+            <a:ext cx="5120640" cy="310896"/>
           </a:xfrm>
           <a:prstGeom prst="rect">
             <a:avLst/>
@@ -5614,7 +5409,7 @@
           <a:p>
             <a:pPr algn="l"/>
             <a:r>
-              <a:rPr sz="1100" b="0">
+              <a:rPr sz="1000" b="0">
                 <a:solidFill>
                   <a:srgbClr val="FFFFFF"/>
                 </a:solidFill>
@@ -5632,8 +5427,8 @@
         </p:nvSpPr>
         <p:spPr>
           <a:xfrm>
-            <a:off x="457200" y="2249424"/>
-            <a:ext cx="7040880" cy="457200"/>
+            <a:off x="457200" y="2029968"/>
+            <a:ext cx="7040880" cy="347472"/>
           </a:xfrm>
           <a:prstGeom prst="rect">
             <a:avLst/>
@@ -5675,8 +5470,8 @@
         </p:nvSpPr>
         <p:spPr>
           <a:xfrm>
-            <a:off x="566928" y="2313432"/>
-            <a:ext cx="1554480" cy="402336"/>
+            <a:off x="566928" y="2075688"/>
+            <a:ext cx="1554480" cy="310896"/>
           </a:xfrm>
           <a:prstGeom prst="rect">
             <a:avLst/>
@@ -5691,7 +5486,7 @@
           <a:p>
             <a:pPr algn="l"/>
             <a:r>
-              <a:rPr sz="1200" b="1">
+              <a:rPr sz="1100" b="1">
                 <a:solidFill>
                   <a:srgbClr val="FFD700"/>
                 </a:solidFill>
@@ -5709,8 +5504,8 @@
         </p:nvSpPr>
         <p:spPr>
           <a:xfrm>
-            <a:off x="2240280" y="2313432"/>
-            <a:ext cx="5120640" cy="402336"/>
+            <a:off x="2240280" y="2075688"/>
+            <a:ext cx="5120640" cy="310896"/>
           </a:xfrm>
           <a:prstGeom prst="rect">
             <a:avLst/>
@@ -5725,7 +5520,7 @@
           <a:p>
             <a:pPr algn="l"/>
             <a:r>
-              <a:rPr sz="1100" b="0">
+              <a:rPr sz="1000" b="0">
                 <a:solidFill>
                   <a:srgbClr val="FFFFFF"/>
                 </a:solidFill>
@@ -5743,8 +5538,8 @@
         </p:nvSpPr>
         <p:spPr>
           <a:xfrm>
-            <a:off x="457200" y="2743200"/>
-            <a:ext cx="7040880" cy="457200"/>
+            <a:off x="457200" y="2414016"/>
+            <a:ext cx="7040880" cy="347472"/>
           </a:xfrm>
           <a:prstGeom prst="rect">
             <a:avLst/>
@@ -5786,8 +5581,8 @@
         </p:nvSpPr>
         <p:spPr>
           <a:xfrm>
-            <a:off x="566928" y="2807208"/>
-            <a:ext cx="1554480" cy="402336"/>
+            <a:off x="566928" y="2459736"/>
+            <a:ext cx="1554480" cy="310896"/>
           </a:xfrm>
           <a:prstGeom prst="rect">
             <a:avLst/>
@@ -5802,7 +5597,7 @@
           <a:p>
             <a:pPr algn="l"/>
             <a:r>
-              <a:rPr sz="1200" b="1">
+              <a:rPr sz="1100" b="1">
                 <a:solidFill>
                   <a:srgbClr val="FFD700"/>
                 </a:solidFill>
@@ -5820,8 +5615,8 @@
         </p:nvSpPr>
         <p:spPr>
           <a:xfrm>
-            <a:off x="2240280" y="2807208"/>
-            <a:ext cx="5120640" cy="402336"/>
+            <a:off x="2240280" y="2459736"/>
+            <a:ext cx="5120640" cy="310896"/>
           </a:xfrm>
           <a:prstGeom prst="rect">
             <a:avLst/>
@@ -5836,7 +5631,7 @@
           <a:p>
             <a:pPr algn="l"/>
             <a:r>
-              <a:rPr sz="1100" b="0">
+              <a:rPr sz="1000" b="0">
                 <a:solidFill>
                   <a:srgbClr val="FFFFFF"/>
                 </a:solidFill>
@@ -5854,8 +5649,8 @@
         </p:nvSpPr>
         <p:spPr>
           <a:xfrm>
-            <a:off x="457200" y="3236976"/>
-            <a:ext cx="7040880" cy="457200"/>
+            <a:off x="457200" y="2798064"/>
+            <a:ext cx="7040880" cy="347472"/>
           </a:xfrm>
           <a:prstGeom prst="rect">
             <a:avLst/>
@@ -5897,8 +5692,8 @@
         </p:nvSpPr>
         <p:spPr>
           <a:xfrm>
-            <a:off x="566928" y="3300984"/>
-            <a:ext cx="1554480" cy="402336"/>
+            <a:off x="566928" y="2843784"/>
+            <a:ext cx="1554480" cy="310896"/>
           </a:xfrm>
           <a:prstGeom prst="rect">
             <a:avLst/>
@@ -5913,7 +5708,7 @@
           <a:p>
             <a:pPr algn="l"/>
             <a:r>
-              <a:rPr sz="1200" b="1">
+              <a:rPr sz="1100" b="1">
                 <a:solidFill>
                   <a:srgbClr val="FFD700"/>
                 </a:solidFill>
@@ -5931,8 +5726,8 @@
         </p:nvSpPr>
         <p:spPr>
           <a:xfrm>
-            <a:off x="2240280" y="3300984"/>
-            <a:ext cx="5120640" cy="402336"/>
+            <a:off x="2240280" y="2843784"/>
+            <a:ext cx="5120640" cy="310896"/>
           </a:xfrm>
           <a:prstGeom prst="rect">
             <a:avLst/>
@@ -5947,7 +5742,7 @@
           <a:p>
             <a:pPr algn="l"/>
             <a:r>
-              <a:rPr sz="1100" b="0">
+              <a:rPr sz="1000" b="0">
                 <a:solidFill>
                   <a:srgbClr val="FFFFFF"/>
                 </a:solidFill>
@@ -6029,7 +5824,7 @@
                   <a:srgbClr val="FFD700"/>
                 </a:solidFill>
               </a:rPr>
-              <a:t>💡 Insights</a:t>
+              <a:t>💡 Insights (회의록)</a:t>
             </a:r>
           </a:p>
         </p:txBody>
@@ -6043,7 +5838,7 @@
         <p:spPr>
           <a:xfrm>
             <a:off x="7680960" y="1307592"/>
-            <a:ext cx="4023360" cy="640080"/>
+            <a:ext cx="4023360" cy="384048"/>
           </a:xfrm>
           <a:prstGeom prst="rect">
             <a:avLst/>
@@ -6085,8 +5880,8 @@
         </p:nvSpPr>
         <p:spPr>
           <a:xfrm>
-            <a:off x="7772400" y="1362456"/>
-            <a:ext cx="3840480" cy="566928"/>
+            <a:off x="7772400" y="1344168"/>
+            <a:ext cx="3840480" cy="329184"/>
           </a:xfrm>
           <a:prstGeom prst="rect">
             <a:avLst/>
@@ -6119,8 +5914,8 @@
         </p:nvSpPr>
         <p:spPr>
           <a:xfrm>
-            <a:off x="7680960" y="1984248"/>
-            <a:ext cx="4023360" cy="640080"/>
+            <a:off x="7680960" y="1728216"/>
+            <a:ext cx="4023360" cy="384048"/>
           </a:xfrm>
           <a:prstGeom prst="rect">
             <a:avLst/>
@@ -6162,8 +5957,8 @@
         </p:nvSpPr>
         <p:spPr>
           <a:xfrm>
-            <a:off x="7772400" y="2039112"/>
-            <a:ext cx="3840480" cy="566928"/>
+            <a:off x="7772400" y="1764792"/>
+            <a:ext cx="3840480" cy="329184"/>
           </a:xfrm>
           <a:prstGeom prst="rect">
             <a:avLst/>
@@ -6196,8 +5991,8 @@
         </p:nvSpPr>
         <p:spPr>
           <a:xfrm>
-            <a:off x="7680960" y="2660904"/>
-            <a:ext cx="4023360" cy="640080"/>
+            <a:off x="7680960" y="2148840"/>
+            <a:ext cx="4023360" cy="384048"/>
           </a:xfrm>
           <a:prstGeom prst="rect">
             <a:avLst/>
@@ -6239,8 +6034,8 @@
         </p:nvSpPr>
         <p:spPr>
           <a:xfrm>
-            <a:off x="7772400" y="2715768"/>
-            <a:ext cx="3840480" cy="566928"/>
+            <a:off x="7772400" y="2185416"/>
+            <a:ext cx="3840480" cy="329184"/>
           </a:xfrm>
           <a:prstGeom prst="rect">
             <a:avLst/>
@@ -6273,8 +6068,8 @@
         </p:nvSpPr>
         <p:spPr>
           <a:xfrm>
-            <a:off x="7680960" y="3337560"/>
-            <a:ext cx="4023360" cy="640080"/>
+            <a:off x="7680960" y="2569464"/>
+            <a:ext cx="4023360" cy="384048"/>
           </a:xfrm>
           <a:prstGeom prst="rect">
             <a:avLst/>
@@ -6316,8 +6111,8 @@
         </p:nvSpPr>
         <p:spPr>
           <a:xfrm>
-            <a:off x="7772400" y="3392424"/>
-            <a:ext cx="3840480" cy="566928"/>
+            <a:off x="7772400" y="2606040"/>
+            <a:ext cx="3840480" cy="329184"/>
           </a:xfrm>
           <a:prstGeom prst="rect">
             <a:avLst/>
@@ -6350,8 +6145,8 @@
         </p:nvSpPr>
         <p:spPr>
           <a:xfrm>
-            <a:off x="7680960" y="4014216"/>
-            <a:ext cx="4023360" cy="640080"/>
+            <a:off x="7680960" y="2990088"/>
+            <a:ext cx="4023360" cy="384048"/>
           </a:xfrm>
           <a:prstGeom prst="rect">
             <a:avLst/>
@@ -6393,8 +6188,8 @@
         </p:nvSpPr>
         <p:spPr>
           <a:xfrm>
-            <a:off x="7772400" y="4069080"/>
-            <a:ext cx="3840480" cy="566928"/>
+            <a:off x="7772400" y="3026664"/>
+            <a:ext cx="3840480" cy="329184"/>
           </a:xfrm>
           <a:prstGeom prst="rect">
             <a:avLst/>
@@ -6414,7 +6209,7 @@
                   <a:srgbClr val="E0E8F5"/>
                 </a:solidFill>
               </a:rPr>
-              <a:t>• Klaf 개발 이유: Claude Code가 에이전트를 스킬처럼 쓰는 경향 → 역할에 맞는 에이전트 개발 유도</a:t>
+              <a:t>• Klaf 개발 이유: Claude Code가 에이전트를 스킬처럼 쓰는 경향 → 역할에 맞는 에이전트 개발 유…</a:t>
             </a:r>
           </a:p>
         </p:txBody>
@@ -6422,6 +6217,160 @@
       <p:sp>
         <p:nvSpPr>
           <p:cNvPr id="37" name="Rectangle 36"/>
+          <p:cNvSpPr/>
+          <p:nvPr/>
+        </p:nvSpPr>
+        <p:spPr>
+          <a:xfrm>
+            <a:off x="457200" y="3520440"/>
+            <a:ext cx="11247120" cy="329184"/>
+          </a:xfrm>
+          <a:prstGeom prst="rect">
+            <a:avLst/>
+          </a:prstGeom>
+          <a:solidFill>
+            <a:srgbClr val="2D4A82"/>
+          </a:solidFill>
+          <a:ln>
+            <a:noFill/>
+          </a:ln>
+        </p:spPr>
+        <p:style>
+          <a:lnRef idx="1">
+            <a:schemeClr val="accent1"/>
+          </a:lnRef>
+          <a:fillRef idx="3">
+            <a:schemeClr val="accent1"/>
+          </a:fillRef>
+          <a:effectRef idx="2">
+            <a:schemeClr val="accent1"/>
+          </a:effectRef>
+          <a:fontRef idx="minor">
+            <a:schemeClr val="lt1"/>
+          </a:fontRef>
+        </p:style>
+        <p:txBody>
+          <a:bodyPr rtlCol="0" anchor="ctr"/>
+          <a:lstStyle/>
+          <a:p>
+            <a:pPr algn="ctr"/>
+          </a:p>
+        </p:txBody>
+      </p:sp>
+      <p:sp>
+        <p:nvSpPr>
+          <p:cNvPr id="38" name="TextBox 37"/>
+          <p:cNvSpPr txBox="1"/>
+          <p:nvPr/>
+        </p:nvSpPr>
+        <p:spPr>
+          <a:xfrm>
+            <a:off x="548640" y="3547872"/>
+            <a:ext cx="10972800" cy="274320"/>
+          </a:xfrm>
+          <a:prstGeom prst="rect">
+            <a:avLst/>
+          </a:prstGeom>
+          <a:noFill/>
+        </p:spPr>
+        <p:txBody>
+          <a:bodyPr wrap="square">
+            <a:spAutoFit/>
+          </a:bodyPr>
+          <a:lstStyle/>
+          <a:p>
+            <a:pPr algn="l"/>
+            <a:r>
+              <a:rPr sz="1300" b="1">
+                <a:solidFill>
+                  <a:srgbClr val="FFD700"/>
+                </a:solidFill>
+              </a:rPr>
+              <a:t>🎙 음성 전사 핵심 내용</a:t>
+            </a:r>
+          </a:p>
+        </p:txBody>
+      </p:sp>
+      <p:sp>
+        <p:nvSpPr>
+          <p:cNvPr id="39" name="Rectangle 38"/>
+          <p:cNvSpPr/>
+          <p:nvPr/>
+        </p:nvSpPr>
+        <p:spPr>
+          <a:xfrm>
+            <a:off x="457200" y="3886200"/>
+            <a:ext cx="11247120" cy="2423160"/>
+          </a:xfrm>
+          <a:prstGeom prst="rect">
+            <a:avLst/>
+          </a:prstGeom>
+          <a:solidFill>
+            <a:srgbClr val="0A1428"/>
+          </a:solidFill>
+          <a:ln>
+            <a:noFill/>
+          </a:ln>
+        </p:spPr>
+        <p:style>
+          <a:lnRef idx="1">
+            <a:schemeClr val="accent1"/>
+          </a:lnRef>
+          <a:fillRef idx="3">
+            <a:schemeClr val="accent1"/>
+          </a:fillRef>
+          <a:effectRef idx="2">
+            <a:schemeClr val="accent1"/>
+          </a:effectRef>
+          <a:fontRef idx="minor">
+            <a:schemeClr val="lt1"/>
+          </a:fontRef>
+        </p:style>
+        <p:txBody>
+          <a:bodyPr rtlCol="0" anchor="ctr"/>
+          <a:lstStyle/>
+          <a:p>
+            <a:pPr algn="ctr"/>
+          </a:p>
+        </p:txBody>
+      </p:sp>
+      <p:sp>
+        <p:nvSpPr>
+          <p:cNvPr id="40" name="TextBox 39"/>
+          <p:cNvSpPr txBox="1"/>
+          <p:nvPr/>
+        </p:nvSpPr>
+        <p:spPr>
+          <a:xfrm>
+            <a:off x="640080" y="3977640"/>
+            <a:ext cx="10881360" cy="2240280"/>
+          </a:xfrm>
+          <a:prstGeom prst="rect">
+            <a:avLst/>
+          </a:prstGeom>
+          <a:noFill/>
+        </p:spPr>
+        <p:txBody>
+          <a:bodyPr wrap="square">
+            <a:spAutoFit/>
+          </a:bodyPr>
+          <a:lstStyle/>
+          <a:p>
+            <a:pPr algn="l"/>
+            <a:r>
+              <a:rPr sz="1100" b="0">
+                <a:solidFill>
+                  <a:srgbClr val="E0E8F5"/>
+                </a:solidFill>
+              </a:rPr>
+              <a:t>※ 음성 전사 미실행. scripts/pipeline.py --year-month 2604 실행 시 Drive 바코스/2604/음성녹음/바코스 4-7.m4a 파일을 바코스/models/ggml-large-v3.bin (Whisper large-v3) 모델로 전사하여 이 영역에 자동 삽입됩니다.</a:t>
+            </a:r>
+          </a:p>
+        </p:txBody>
+      </p:sp>
+      <p:sp>
+        <p:nvSpPr>
+          <p:cNvPr id="41" name="Rectangle 40"/>
           <p:cNvSpPr/>
           <p:nvPr/>
         </p:nvSpPr>
@@ -6464,7 +6413,7 @@
       </p:sp>
       <p:sp>
         <p:nvSpPr>
-          <p:cNvPr id="38" name="TextBox 37"/>
+          <p:cNvPr id="42" name="TextBox 41"/>
           <p:cNvSpPr txBox="1"/>
           <p:nvPr/>
         </p:nvSpPr>
@@ -6491,7 +6440,7 @@
                   <a:srgbClr val="888888"/>
                 </a:solidFill>
               </a:rPr>
-              <a:t>BCS 스터디 · 2026년 4월 · 4/7</a:t>
+              <a:t>BCS 스터디 · 2026년 4월 · 4/7 · 회의록 + 녹취록 통합</a:t>
             </a:r>
           </a:p>
         </p:txBody>
@@ -6825,7 +6774,7 @@
                   <a:srgbClr val="FFFFFF"/>
                 </a:solidFill>
               </a:rPr>
-              <a:t>▪ 이번주 진행 내용</a:t>
+              <a:t>▪ 진행 내용 (회의록)</a:t>
             </a:r>
           </a:p>
         </p:txBody>
@@ -6839,7 +6788,7 @@
         <p:spPr>
           <a:xfrm>
             <a:off x="457200" y="1261872"/>
-            <a:ext cx="7040880" cy="457200"/>
+            <a:ext cx="7040880" cy="347472"/>
           </a:xfrm>
           <a:prstGeom prst="rect">
             <a:avLst/>
@@ -6881,8 +6830,8 @@
         </p:nvSpPr>
         <p:spPr>
           <a:xfrm>
-            <a:off x="566928" y="1325880"/>
-            <a:ext cx="1554480" cy="402336"/>
+            <a:off x="566928" y="1307592"/>
+            <a:ext cx="1554480" cy="310896"/>
           </a:xfrm>
           <a:prstGeom prst="rect">
             <a:avLst/>
@@ -6897,7 +6846,7 @@
           <a:p>
             <a:pPr algn="l"/>
             <a:r>
-              <a:rPr sz="1200" b="1">
+              <a:rPr sz="1100" b="1">
                 <a:solidFill>
                   <a:srgbClr val="FFD700"/>
                 </a:solidFill>
@@ -6915,8 +6864,8 @@
         </p:nvSpPr>
         <p:spPr>
           <a:xfrm>
-            <a:off x="2240280" y="1325880"/>
-            <a:ext cx="5120640" cy="402336"/>
+            <a:off x="2240280" y="1307592"/>
+            <a:ext cx="5120640" cy="310896"/>
           </a:xfrm>
           <a:prstGeom prst="rect">
             <a:avLst/>
@@ -6931,7 +6880,7 @@
           <a:p>
             <a:pPr algn="l"/>
             <a:r>
-              <a:rPr sz="1100" b="0">
+              <a:rPr sz="1000" b="0">
                 <a:solidFill>
                   <a:srgbClr val="FFFFFF"/>
                 </a:solidFill>
@@ -6949,8 +6898,8 @@
         </p:nvSpPr>
         <p:spPr>
           <a:xfrm>
-            <a:off x="457200" y="1755648"/>
-            <a:ext cx="7040880" cy="457200"/>
+            <a:off x="457200" y="1645920"/>
+            <a:ext cx="7040880" cy="347472"/>
           </a:xfrm>
           <a:prstGeom prst="rect">
             <a:avLst/>
@@ -6992,8 +6941,8 @@
         </p:nvSpPr>
         <p:spPr>
           <a:xfrm>
-            <a:off x="566928" y="1819656"/>
-            <a:ext cx="1554480" cy="402336"/>
+            <a:off x="566928" y="1691640"/>
+            <a:ext cx="1554480" cy="310896"/>
           </a:xfrm>
           <a:prstGeom prst="rect">
             <a:avLst/>
@@ -7008,7 +6957,7 @@
           <a:p>
             <a:pPr algn="l"/>
             <a:r>
-              <a:rPr sz="1200" b="1">
+              <a:rPr sz="1100" b="1">
                 <a:solidFill>
                   <a:srgbClr val="FFD700"/>
                 </a:solidFill>
@@ -7026,8 +6975,8 @@
         </p:nvSpPr>
         <p:spPr>
           <a:xfrm>
-            <a:off x="2240280" y="1819656"/>
-            <a:ext cx="5120640" cy="402336"/>
+            <a:off x="2240280" y="1691640"/>
+            <a:ext cx="5120640" cy="310896"/>
           </a:xfrm>
           <a:prstGeom prst="rect">
             <a:avLst/>
@@ -7042,7 +6991,7 @@
           <a:p>
             <a:pPr algn="l"/>
             <a:r>
-              <a:rPr sz="1100" b="0">
+              <a:rPr sz="1000" b="0">
                 <a:solidFill>
                   <a:srgbClr val="FFFFFF"/>
                 </a:solidFill>
@@ -7060,8 +7009,8 @@
         </p:nvSpPr>
         <p:spPr>
           <a:xfrm>
-            <a:off x="457200" y="2249424"/>
-            <a:ext cx="7040880" cy="457200"/>
+            <a:off x="457200" y="2029968"/>
+            <a:ext cx="7040880" cy="347472"/>
           </a:xfrm>
           <a:prstGeom prst="rect">
             <a:avLst/>
@@ -7103,8 +7052,8 @@
         </p:nvSpPr>
         <p:spPr>
           <a:xfrm>
-            <a:off x="566928" y="2313432"/>
-            <a:ext cx="1554480" cy="402336"/>
+            <a:off x="566928" y="2075688"/>
+            <a:ext cx="1554480" cy="310896"/>
           </a:xfrm>
           <a:prstGeom prst="rect">
             <a:avLst/>
@@ -7119,7 +7068,7 @@
           <a:p>
             <a:pPr algn="l"/>
             <a:r>
-              <a:rPr sz="1200" b="1">
+              <a:rPr sz="1100" b="1">
                 <a:solidFill>
                   <a:srgbClr val="FFD700"/>
                 </a:solidFill>
@@ -7137,8 +7086,8 @@
         </p:nvSpPr>
         <p:spPr>
           <a:xfrm>
-            <a:off x="2240280" y="2313432"/>
-            <a:ext cx="5120640" cy="402336"/>
+            <a:off x="2240280" y="2075688"/>
+            <a:ext cx="5120640" cy="310896"/>
           </a:xfrm>
           <a:prstGeom prst="rect">
             <a:avLst/>
@@ -7153,7 +7102,7 @@
           <a:p>
             <a:pPr algn="l"/>
             <a:r>
-              <a:rPr sz="1100" b="0">
+              <a:rPr sz="1000" b="0">
                 <a:solidFill>
                   <a:srgbClr val="FFFFFF"/>
                 </a:solidFill>
@@ -7171,8 +7120,8 @@
         </p:nvSpPr>
         <p:spPr>
           <a:xfrm>
-            <a:off x="457200" y="2743200"/>
-            <a:ext cx="7040880" cy="457200"/>
+            <a:off x="457200" y="2414016"/>
+            <a:ext cx="7040880" cy="347472"/>
           </a:xfrm>
           <a:prstGeom prst="rect">
             <a:avLst/>
@@ -7214,8 +7163,8 @@
         </p:nvSpPr>
         <p:spPr>
           <a:xfrm>
-            <a:off x="566928" y="2807208"/>
-            <a:ext cx="1554480" cy="402336"/>
+            <a:off x="566928" y="2459736"/>
+            <a:ext cx="1554480" cy="310896"/>
           </a:xfrm>
           <a:prstGeom prst="rect">
             <a:avLst/>
@@ -7230,7 +7179,7 @@
           <a:p>
             <a:pPr algn="l"/>
             <a:r>
-              <a:rPr sz="1200" b="1">
+              <a:rPr sz="1100" b="1">
                 <a:solidFill>
                   <a:srgbClr val="FFD700"/>
                 </a:solidFill>
@@ -7248,8 +7197,8 @@
         </p:nvSpPr>
         <p:spPr>
           <a:xfrm>
-            <a:off x="2240280" y="2807208"/>
-            <a:ext cx="5120640" cy="402336"/>
+            <a:off x="2240280" y="2459736"/>
+            <a:ext cx="5120640" cy="310896"/>
           </a:xfrm>
           <a:prstGeom prst="rect">
             <a:avLst/>
@@ -7264,7 +7213,7 @@
           <a:p>
             <a:pPr algn="l"/>
             <a:r>
-              <a:rPr sz="1100" b="0">
+              <a:rPr sz="1000" b="0">
                 <a:solidFill>
                   <a:srgbClr val="FFFFFF"/>
                 </a:solidFill>
@@ -7282,8 +7231,8 @@
         </p:nvSpPr>
         <p:spPr>
           <a:xfrm>
-            <a:off x="457200" y="3236976"/>
-            <a:ext cx="7040880" cy="457200"/>
+            <a:off x="457200" y="2798064"/>
+            <a:ext cx="7040880" cy="347472"/>
           </a:xfrm>
           <a:prstGeom prst="rect">
             <a:avLst/>
@@ -7325,8 +7274,8 @@
         </p:nvSpPr>
         <p:spPr>
           <a:xfrm>
-            <a:off x="566928" y="3300984"/>
-            <a:ext cx="1554480" cy="402336"/>
+            <a:off x="566928" y="2843784"/>
+            <a:ext cx="1554480" cy="310896"/>
           </a:xfrm>
           <a:prstGeom prst="rect">
             <a:avLst/>
@@ -7341,7 +7290,7 @@
           <a:p>
             <a:pPr algn="l"/>
             <a:r>
-              <a:rPr sz="1200" b="1">
+              <a:rPr sz="1100" b="1">
                 <a:solidFill>
                   <a:srgbClr val="FFD700"/>
                 </a:solidFill>
@@ -7359,8 +7308,8 @@
         </p:nvSpPr>
         <p:spPr>
           <a:xfrm>
-            <a:off x="2240280" y="3300984"/>
-            <a:ext cx="5120640" cy="402336"/>
+            <a:off x="2240280" y="2843784"/>
+            <a:ext cx="5120640" cy="310896"/>
           </a:xfrm>
           <a:prstGeom prst="rect">
             <a:avLst/>
@@ -7375,7 +7324,7 @@
           <a:p>
             <a:pPr algn="l"/>
             <a:r>
-              <a:rPr sz="1100" b="0">
+              <a:rPr sz="1000" b="0">
                 <a:solidFill>
                   <a:srgbClr val="FFFFFF"/>
                 </a:solidFill>
@@ -7457,7 +7406,7 @@
                   <a:srgbClr val="FFD700"/>
                 </a:solidFill>
               </a:rPr>
-              <a:t>💡 Insights</a:t>
+              <a:t>💡 Insights (회의록)</a:t>
             </a:r>
           </a:p>
         </p:txBody>
@@ -7471,7 +7420,7 @@
         <p:spPr>
           <a:xfrm>
             <a:off x="7680960" y="1307592"/>
-            <a:ext cx="4023360" cy="640080"/>
+            <a:ext cx="4023360" cy="384048"/>
           </a:xfrm>
           <a:prstGeom prst="rect">
             <a:avLst/>
@@ -7513,8 +7462,8 @@
         </p:nvSpPr>
         <p:spPr>
           <a:xfrm>
-            <a:off x="7772400" y="1362456"/>
-            <a:ext cx="3840480" cy="566928"/>
+            <a:off x="7772400" y="1344168"/>
+            <a:ext cx="3840480" cy="329184"/>
           </a:xfrm>
           <a:prstGeom prst="rect">
             <a:avLst/>
@@ -7547,8 +7496,8 @@
         </p:nvSpPr>
         <p:spPr>
           <a:xfrm>
-            <a:off x="7680960" y="1984248"/>
-            <a:ext cx="4023360" cy="640080"/>
+            <a:off x="7680960" y="1728216"/>
+            <a:ext cx="4023360" cy="384048"/>
           </a:xfrm>
           <a:prstGeom prst="rect">
             <a:avLst/>
@@ -7590,8 +7539,8 @@
         </p:nvSpPr>
         <p:spPr>
           <a:xfrm>
-            <a:off x="7772400" y="2039112"/>
-            <a:ext cx="3840480" cy="566928"/>
+            <a:off x="7772400" y="1764792"/>
+            <a:ext cx="3840480" cy="329184"/>
           </a:xfrm>
           <a:prstGeom prst="rect">
             <a:avLst/>
@@ -7624,8 +7573,8 @@
         </p:nvSpPr>
         <p:spPr>
           <a:xfrm>
-            <a:off x="7680960" y="2660904"/>
-            <a:ext cx="4023360" cy="640080"/>
+            <a:off x="7680960" y="2148840"/>
+            <a:ext cx="4023360" cy="384048"/>
           </a:xfrm>
           <a:prstGeom prst="rect">
             <a:avLst/>
@@ -7667,8 +7616,8 @@
         </p:nvSpPr>
         <p:spPr>
           <a:xfrm>
-            <a:off x="7772400" y="2715768"/>
-            <a:ext cx="3840480" cy="566928"/>
+            <a:off x="7772400" y="2185416"/>
+            <a:ext cx="3840480" cy="329184"/>
           </a:xfrm>
           <a:prstGeom prst="rect">
             <a:avLst/>
@@ -7701,8 +7650,8 @@
         </p:nvSpPr>
         <p:spPr>
           <a:xfrm>
-            <a:off x="7680960" y="3337560"/>
-            <a:ext cx="4023360" cy="640080"/>
+            <a:off x="7680960" y="2569464"/>
+            <a:ext cx="4023360" cy="384048"/>
           </a:xfrm>
           <a:prstGeom prst="rect">
             <a:avLst/>
@@ -7744,8 +7693,8 @@
         </p:nvSpPr>
         <p:spPr>
           <a:xfrm>
-            <a:off x="7772400" y="3392424"/>
-            <a:ext cx="3840480" cy="566928"/>
+            <a:off x="7772400" y="2606040"/>
+            <a:ext cx="3840480" cy="329184"/>
           </a:xfrm>
           <a:prstGeom prst="rect">
             <a:avLst/>
@@ -7773,6 +7722,160 @@
       <p:sp>
         <p:nvSpPr>
           <p:cNvPr id="35" name="Rectangle 34"/>
+          <p:cNvSpPr/>
+          <p:nvPr/>
+        </p:nvSpPr>
+        <p:spPr>
+          <a:xfrm>
+            <a:off x="457200" y="3520440"/>
+            <a:ext cx="11247120" cy="329184"/>
+          </a:xfrm>
+          <a:prstGeom prst="rect">
+            <a:avLst/>
+          </a:prstGeom>
+          <a:solidFill>
+            <a:srgbClr val="2D4A82"/>
+          </a:solidFill>
+          <a:ln>
+            <a:noFill/>
+          </a:ln>
+        </p:spPr>
+        <p:style>
+          <a:lnRef idx="1">
+            <a:schemeClr val="accent1"/>
+          </a:lnRef>
+          <a:fillRef idx="3">
+            <a:schemeClr val="accent1"/>
+          </a:fillRef>
+          <a:effectRef idx="2">
+            <a:schemeClr val="accent1"/>
+          </a:effectRef>
+          <a:fontRef idx="minor">
+            <a:schemeClr val="lt1"/>
+          </a:fontRef>
+        </p:style>
+        <p:txBody>
+          <a:bodyPr rtlCol="0" anchor="ctr"/>
+          <a:lstStyle/>
+          <a:p>
+            <a:pPr algn="ctr"/>
+          </a:p>
+        </p:txBody>
+      </p:sp>
+      <p:sp>
+        <p:nvSpPr>
+          <p:cNvPr id="36" name="TextBox 35"/>
+          <p:cNvSpPr txBox="1"/>
+          <p:nvPr/>
+        </p:nvSpPr>
+        <p:spPr>
+          <a:xfrm>
+            <a:off x="548640" y="3547872"/>
+            <a:ext cx="10972800" cy="274320"/>
+          </a:xfrm>
+          <a:prstGeom prst="rect">
+            <a:avLst/>
+          </a:prstGeom>
+          <a:noFill/>
+        </p:spPr>
+        <p:txBody>
+          <a:bodyPr wrap="square">
+            <a:spAutoFit/>
+          </a:bodyPr>
+          <a:lstStyle/>
+          <a:p>
+            <a:pPr algn="l"/>
+            <a:r>
+              <a:rPr sz="1300" b="1">
+                <a:solidFill>
+                  <a:srgbClr val="FFD700"/>
+                </a:solidFill>
+              </a:rPr>
+              <a:t>🎙 음성 전사 핵심 내용</a:t>
+            </a:r>
+          </a:p>
+        </p:txBody>
+      </p:sp>
+      <p:sp>
+        <p:nvSpPr>
+          <p:cNvPr id="37" name="Rectangle 36"/>
+          <p:cNvSpPr/>
+          <p:nvPr/>
+        </p:nvSpPr>
+        <p:spPr>
+          <a:xfrm>
+            <a:off x="457200" y="3886200"/>
+            <a:ext cx="11247120" cy="2423160"/>
+          </a:xfrm>
+          <a:prstGeom prst="rect">
+            <a:avLst/>
+          </a:prstGeom>
+          <a:solidFill>
+            <a:srgbClr val="0A1428"/>
+          </a:solidFill>
+          <a:ln>
+            <a:noFill/>
+          </a:ln>
+        </p:spPr>
+        <p:style>
+          <a:lnRef idx="1">
+            <a:schemeClr val="accent1"/>
+          </a:lnRef>
+          <a:fillRef idx="3">
+            <a:schemeClr val="accent1"/>
+          </a:fillRef>
+          <a:effectRef idx="2">
+            <a:schemeClr val="accent1"/>
+          </a:effectRef>
+          <a:fontRef idx="minor">
+            <a:schemeClr val="lt1"/>
+          </a:fontRef>
+        </p:style>
+        <p:txBody>
+          <a:bodyPr rtlCol="0" anchor="ctr"/>
+          <a:lstStyle/>
+          <a:p>
+            <a:pPr algn="ctr"/>
+          </a:p>
+        </p:txBody>
+      </p:sp>
+      <p:sp>
+        <p:nvSpPr>
+          <p:cNvPr id="38" name="TextBox 37"/>
+          <p:cNvSpPr txBox="1"/>
+          <p:nvPr/>
+        </p:nvSpPr>
+        <p:spPr>
+          <a:xfrm>
+            <a:off x="640080" y="3977640"/>
+            <a:ext cx="10881360" cy="2240280"/>
+          </a:xfrm>
+          <a:prstGeom prst="rect">
+            <a:avLst/>
+          </a:prstGeom>
+          <a:noFill/>
+        </p:spPr>
+        <p:txBody>
+          <a:bodyPr wrap="square">
+            <a:spAutoFit/>
+          </a:bodyPr>
+          <a:lstStyle/>
+          <a:p>
+            <a:pPr algn="l"/>
+            <a:r>
+              <a:rPr sz="1100" b="0">
+                <a:solidFill>
+                  <a:srgbClr val="E0E8F5"/>
+                </a:solidFill>
+              </a:rPr>
+              <a:t>※ 음성 전사 미실행. scripts/pipeline.py --year-month 2604 실행 시 Drive 바코스/2604/음성녹음/바코스 4-14.m4a 파일을 바코스/models/ggml-large-v3.bin (Whisper large-v3) 모델로 전사하여 이 영역에 자동 삽입됩니다.</a:t>
+            </a:r>
+          </a:p>
+        </p:txBody>
+      </p:sp>
+      <p:sp>
+        <p:nvSpPr>
+          <p:cNvPr id="39" name="Rectangle 38"/>
           <p:cNvSpPr/>
           <p:nvPr/>
         </p:nvSpPr>
@@ -7815,7 +7918,7 @@
       </p:sp>
       <p:sp>
         <p:nvSpPr>
-          <p:cNvPr id="36" name="TextBox 35"/>
+          <p:cNvPr id="40" name="TextBox 39"/>
           <p:cNvSpPr txBox="1"/>
           <p:nvPr/>
         </p:nvSpPr>
@@ -7842,7 +7945,7 @@
                   <a:srgbClr val="888888"/>
                 </a:solidFill>
               </a:rPr>
-              <a:t>BCS 스터디 · 2026년 4월 · 4/14</a:t>
+              <a:t>BCS 스터디 · 2026년 4월 · 4/14 · 회의록 + 녹취록 통합</a:t>
             </a:r>
           </a:p>
         </p:txBody>
@@ -8176,7 +8279,7 @@
                   <a:srgbClr val="FFFFFF"/>
                 </a:solidFill>
               </a:rPr>
-              <a:t>▪ 이번주 진행 내용</a:t>
+              <a:t>▪ 진행 내용 (회의록)</a:t>
             </a:r>
           </a:p>
         </p:txBody>
@@ -8190,7 +8293,7 @@
         <p:spPr>
           <a:xfrm>
             <a:off x="457200" y="1261872"/>
-            <a:ext cx="7040880" cy="457200"/>
+            <a:ext cx="7040880" cy="347472"/>
           </a:xfrm>
           <a:prstGeom prst="rect">
             <a:avLst/>
@@ -8232,8 +8335,8 @@
         </p:nvSpPr>
         <p:spPr>
           <a:xfrm>
-            <a:off x="566928" y="1325880"/>
-            <a:ext cx="1554480" cy="402336"/>
+            <a:off x="566928" y="1307592"/>
+            <a:ext cx="1554480" cy="310896"/>
           </a:xfrm>
           <a:prstGeom prst="rect">
             <a:avLst/>
@@ -8248,7 +8351,7 @@
           <a:p>
             <a:pPr algn="l"/>
             <a:r>
-              <a:rPr sz="1200" b="1">
+              <a:rPr sz="1100" b="1">
                 <a:solidFill>
                   <a:srgbClr val="FFD700"/>
                 </a:solidFill>
@@ -8266,8 +8369,8 @@
         </p:nvSpPr>
         <p:spPr>
           <a:xfrm>
-            <a:off x="2240280" y="1325880"/>
-            <a:ext cx="5120640" cy="402336"/>
+            <a:off x="2240280" y="1307592"/>
+            <a:ext cx="5120640" cy="310896"/>
           </a:xfrm>
           <a:prstGeom prst="rect">
             <a:avLst/>
@@ -8282,7 +8385,7 @@
           <a:p>
             <a:pPr algn="l"/>
             <a:r>
-              <a:rPr sz="1100" b="0">
+              <a:rPr sz="1000" b="0">
                 <a:solidFill>
                   <a:srgbClr val="FFFFFF"/>
                 </a:solidFill>
@@ -8300,8 +8403,8 @@
         </p:nvSpPr>
         <p:spPr>
           <a:xfrm>
-            <a:off x="457200" y="1755648"/>
-            <a:ext cx="7040880" cy="457200"/>
+            <a:off x="457200" y="1645920"/>
+            <a:ext cx="7040880" cy="347472"/>
           </a:xfrm>
           <a:prstGeom prst="rect">
             <a:avLst/>
@@ -8343,8 +8446,8 @@
         </p:nvSpPr>
         <p:spPr>
           <a:xfrm>
-            <a:off x="566928" y="1819656"/>
-            <a:ext cx="1554480" cy="402336"/>
+            <a:off x="566928" y="1691640"/>
+            <a:ext cx="1554480" cy="310896"/>
           </a:xfrm>
           <a:prstGeom prst="rect">
             <a:avLst/>
@@ -8359,7 +8462,7 @@
           <a:p>
             <a:pPr algn="l"/>
             <a:r>
-              <a:rPr sz="1200" b="1">
+              <a:rPr sz="1100" b="1">
                 <a:solidFill>
                   <a:srgbClr val="FFD700"/>
                 </a:solidFill>
@@ -8377,8 +8480,8 @@
         </p:nvSpPr>
         <p:spPr>
           <a:xfrm>
-            <a:off x="2240280" y="1819656"/>
-            <a:ext cx="5120640" cy="402336"/>
+            <a:off x="2240280" y="1691640"/>
+            <a:ext cx="5120640" cy="310896"/>
           </a:xfrm>
           <a:prstGeom prst="rect">
             <a:avLst/>
@@ -8393,7 +8496,7 @@
           <a:p>
             <a:pPr algn="l"/>
             <a:r>
-              <a:rPr sz="1100" b="0">
+              <a:rPr sz="1000" b="0">
                 <a:solidFill>
                   <a:srgbClr val="FFFFFF"/>
                 </a:solidFill>
@@ -8411,8 +8514,8 @@
         </p:nvSpPr>
         <p:spPr>
           <a:xfrm>
-            <a:off x="457200" y="2249424"/>
-            <a:ext cx="7040880" cy="457200"/>
+            <a:off x="457200" y="2029968"/>
+            <a:ext cx="7040880" cy="347472"/>
           </a:xfrm>
           <a:prstGeom prst="rect">
             <a:avLst/>
@@ -8454,8 +8557,8 @@
         </p:nvSpPr>
         <p:spPr>
           <a:xfrm>
-            <a:off x="566928" y="2313432"/>
-            <a:ext cx="1554480" cy="402336"/>
+            <a:off x="566928" y="2075688"/>
+            <a:ext cx="1554480" cy="310896"/>
           </a:xfrm>
           <a:prstGeom prst="rect">
             <a:avLst/>
@@ -8470,7 +8573,7 @@
           <a:p>
             <a:pPr algn="l"/>
             <a:r>
-              <a:rPr sz="1200" b="1">
+              <a:rPr sz="1100" b="1">
                 <a:solidFill>
                   <a:srgbClr val="FFD700"/>
                 </a:solidFill>
@@ -8488,8 +8591,8 @@
         </p:nvSpPr>
         <p:spPr>
           <a:xfrm>
-            <a:off x="2240280" y="2313432"/>
-            <a:ext cx="5120640" cy="402336"/>
+            <a:off x="2240280" y="2075688"/>
+            <a:ext cx="5120640" cy="310896"/>
           </a:xfrm>
           <a:prstGeom prst="rect">
             <a:avLst/>
@@ -8504,7 +8607,7 @@
           <a:p>
             <a:pPr algn="l"/>
             <a:r>
-              <a:rPr sz="1100" b="0">
+              <a:rPr sz="1000" b="0">
                 <a:solidFill>
                   <a:srgbClr val="FFFFFF"/>
                 </a:solidFill>
@@ -8522,8 +8625,8 @@
         </p:nvSpPr>
         <p:spPr>
           <a:xfrm>
-            <a:off x="457200" y="2743200"/>
-            <a:ext cx="7040880" cy="457200"/>
+            <a:off x="457200" y="2414016"/>
+            <a:ext cx="7040880" cy="347472"/>
           </a:xfrm>
           <a:prstGeom prst="rect">
             <a:avLst/>
@@ -8565,8 +8668,8 @@
         </p:nvSpPr>
         <p:spPr>
           <a:xfrm>
-            <a:off x="566928" y="2807208"/>
-            <a:ext cx="1554480" cy="402336"/>
+            <a:off x="566928" y="2459736"/>
+            <a:ext cx="1554480" cy="310896"/>
           </a:xfrm>
           <a:prstGeom prst="rect">
             <a:avLst/>
@@ -8581,7 +8684,7 @@
           <a:p>
             <a:pPr algn="l"/>
             <a:r>
-              <a:rPr sz="1200" b="1">
+              <a:rPr sz="1100" b="1">
                 <a:solidFill>
                   <a:srgbClr val="FFD700"/>
                 </a:solidFill>
@@ -8599,8 +8702,8 @@
         </p:nvSpPr>
         <p:spPr>
           <a:xfrm>
-            <a:off x="2240280" y="2807208"/>
-            <a:ext cx="5120640" cy="402336"/>
+            <a:off x="2240280" y="2459736"/>
+            <a:ext cx="5120640" cy="310896"/>
           </a:xfrm>
           <a:prstGeom prst="rect">
             <a:avLst/>
@@ -8615,7 +8718,7 @@
           <a:p>
             <a:pPr algn="l"/>
             <a:r>
-              <a:rPr sz="1100" b="0">
+              <a:rPr sz="1000" b="0">
                 <a:solidFill>
                   <a:srgbClr val="FFFFFF"/>
                 </a:solidFill>
@@ -8633,8 +8736,8 @@
         </p:nvSpPr>
         <p:spPr>
           <a:xfrm>
-            <a:off x="457200" y="3236976"/>
-            <a:ext cx="7040880" cy="457200"/>
+            <a:off x="457200" y="2798064"/>
+            <a:ext cx="7040880" cy="347472"/>
           </a:xfrm>
           <a:prstGeom prst="rect">
             <a:avLst/>
@@ -8676,8 +8779,8 @@
         </p:nvSpPr>
         <p:spPr>
           <a:xfrm>
-            <a:off x="566928" y="3300984"/>
-            <a:ext cx="1554480" cy="402336"/>
+            <a:off x="566928" y="2843784"/>
+            <a:ext cx="1554480" cy="310896"/>
           </a:xfrm>
           <a:prstGeom prst="rect">
             <a:avLst/>
@@ -8692,7 +8795,7 @@
           <a:p>
             <a:pPr algn="l"/>
             <a:r>
-              <a:rPr sz="1200" b="1">
+              <a:rPr sz="1100" b="1">
                 <a:solidFill>
                   <a:srgbClr val="FFD700"/>
                 </a:solidFill>
@@ -8710,8 +8813,8 @@
         </p:nvSpPr>
         <p:spPr>
           <a:xfrm>
-            <a:off x="2240280" y="3300984"/>
-            <a:ext cx="5120640" cy="402336"/>
+            <a:off x="2240280" y="2843784"/>
+            <a:ext cx="5120640" cy="310896"/>
           </a:xfrm>
           <a:prstGeom prst="rect">
             <a:avLst/>
@@ -8726,7 +8829,7 @@
           <a:p>
             <a:pPr algn="l"/>
             <a:r>
-              <a:rPr sz="1100" b="0">
+              <a:rPr sz="1000" b="0">
                 <a:solidFill>
                   <a:srgbClr val="FFFFFF"/>
                 </a:solidFill>
@@ -8808,7 +8911,7 @@
                   <a:srgbClr val="FFD700"/>
                 </a:solidFill>
               </a:rPr>
-              <a:t>💡 Insights</a:t>
+              <a:t>💡 Insights (회의록)</a:t>
             </a:r>
           </a:p>
         </p:txBody>
@@ -8822,7 +8925,7 @@
         <p:spPr>
           <a:xfrm>
             <a:off x="7680960" y="1307592"/>
-            <a:ext cx="4023360" cy="640080"/>
+            <a:ext cx="4023360" cy="384048"/>
           </a:xfrm>
           <a:prstGeom prst="rect">
             <a:avLst/>
@@ -8864,8 +8967,8 @@
         </p:nvSpPr>
         <p:spPr>
           <a:xfrm>
-            <a:off x="7772400" y="1362456"/>
-            <a:ext cx="3840480" cy="566928"/>
+            <a:off x="7772400" y="1344168"/>
+            <a:ext cx="3840480" cy="329184"/>
           </a:xfrm>
           <a:prstGeom prst="rect">
             <a:avLst/>
@@ -8898,8 +9001,8 @@
         </p:nvSpPr>
         <p:spPr>
           <a:xfrm>
-            <a:off x="7680960" y="1984248"/>
-            <a:ext cx="4023360" cy="640080"/>
+            <a:off x="7680960" y="1728216"/>
+            <a:ext cx="4023360" cy="384048"/>
           </a:xfrm>
           <a:prstGeom prst="rect">
             <a:avLst/>
@@ -8941,8 +9044,8 @@
         </p:nvSpPr>
         <p:spPr>
           <a:xfrm>
-            <a:off x="7772400" y="2039112"/>
-            <a:ext cx="3840480" cy="566928"/>
+            <a:off x="7772400" y="1764792"/>
+            <a:ext cx="3840480" cy="329184"/>
           </a:xfrm>
           <a:prstGeom prst="rect">
             <a:avLst/>
@@ -8975,8 +9078,8 @@
         </p:nvSpPr>
         <p:spPr>
           <a:xfrm>
-            <a:off x="7680960" y="2660904"/>
-            <a:ext cx="4023360" cy="640080"/>
+            <a:off x="7680960" y="2148840"/>
+            <a:ext cx="4023360" cy="384048"/>
           </a:xfrm>
           <a:prstGeom prst="rect">
             <a:avLst/>
@@ -9018,8 +9121,8 @@
         </p:nvSpPr>
         <p:spPr>
           <a:xfrm>
-            <a:off x="7772400" y="2715768"/>
-            <a:ext cx="3840480" cy="566928"/>
+            <a:off x="7772400" y="2185416"/>
+            <a:ext cx="3840480" cy="329184"/>
           </a:xfrm>
           <a:prstGeom prst="rect">
             <a:avLst/>
@@ -9052,8 +9155,8 @@
         </p:nvSpPr>
         <p:spPr>
           <a:xfrm>
-            <a:off x="7680960" y="3337560"/>
-            <a:ext cx="4023360" cy="640080"/>
+            <a:off x="7680960" y="2569464"/>
+            <a:ext cx="4023360" cy="384048"/>
           </a:xfrm>
           <a:prstGeom prst="rect">
             <a:avLst/>
@@ -9095,8 +9198,8 @@
         </p:nvSpPr>
         <p:spPr>
           <a:xfrm>
-            <a:off x="7772400" y="3392424"/>
-            <a:ext cx="3840480" cy="566928"/>
+            <a:off x="7772400" y="2606040"/>
+            <a:ext cx="3840480" cy="329184"/>
           </a:xfrm>
           <a:prstGeom prst="rect">
             <a:avLst/>
@@ -9129,8 +9232,8 @@
         </p:nvSpPr>
         <p:spPr>
           <a:xfrm>
-            <a:off x="7680960" y="4014216"/>
-            <a:ext cx="4023360" cy="640080"/>
+            <a:off x="7680960" y="2990088"/>
+            <a:ext cx="4023360" cy="384048"/>
           </a:xfrm>
           <a:prstGeom prst="rect">
             <a:avLst/>
@@ -9172,8 +9275,8 @@
         </p:nvSpPr>
         <p:spPr>
           <a:xfrm>
-            <a:off x="7772400" y="4069080"/>
-            <a:ext cx="3840480" cy="566928"/>
+            <a:off x="7772400" y="3026664"/>
+            <a:ext cx="3840480" cy="329184"/>
           </a:xfrm>
           <a:prstGeom prst="rect">
             <a:avLst/>
@@ -9206,14 +9309,14 @@
         </p:nvSpPr>
         <p:spPr>
           <a:xfrm>
-            <a:off x="7680960" y="4690872"/>
-            <a:ext cx="4023360" cy="640080"/>
+            <a:off x="457200" y="3520440"/>
+            <a:ext cx="11247120" cy="329184"/>
           </a:xfrm>
           <a:prstGeom prst="rect">
             <a:avLst/>
           </a:prstGeom>
           <a:solidFill>
-            <a:srgbClr val="0D203D"/>
+            <a:srgbClr val="2D4A82"/>
           </a:solidFill>
           <a:ln>
             <a:noFill/>
@@ -9249,8 +9352,8 @@
         </p:nvSpPr>
         <p:spPr>
           <a:xfrm>
-            <a:off x="7772400" y="4745736"/>
-            <a:ext cx="3840480" cy="566928"/>
+            <a:off x="548640" y="3547872"/>
+            <a:ext cx="10972800" cy="274320"/>
           </a:xfrm>
           <a:prstGeom prst="rect">
             <a:avLst/>
@@ -9265,19 +9368,96 @@
           <a:p>
             <a:pPr algn="l"/>
             <a:r>
-              <a:rPr sz="1000" b="0">
+              <a:rPr sz="1300" b="1">
+                <a:solidFill>
+                  <a:srgbClr val="FFD700"/>
+                </a:solidFill>
+              </a:rPr>
+              <a:t>🎙 음성 전사 핵심 내용</a:t>
+            </a:r>
+          </a:p>
+        </p:txBody>
+      </p:sp>
+      <p:sp>
+        <p:nvSpPr>
+          <p:cNvPr id="39" name="Rectangle 38"/>
+          <p:cNvSpPr/>
+          <p:nvPr/>
+        </p:nvSpPr>
+        <p:spPr>
+          <a:xfrm>
+            <a:off x="457200" y="3886200"/>
+            <a:ext cx="11247120" cy="2423160"/>
+          </a:xfrm>
+          <a:prstGeom prst="rect">
+            <a:avLst/>
+          </a:prstGeom>
+          <a:solidFill>
+            <a:srgbClr val="0A1428"/>
+          </a:solidFill>
+          <a:ln>
+            <a:noFill/>
+          </a:ln>
+        </p:spPr>
+        <p:style>
+          <a:lnRef idx="1">
+            <a:schemeClr val="accent1"/>
+          </a:lnRef>
+          <a:fillRef idx="3">
+            <a:schemeClr val="accent1"/>
+          </a:fillRef>
+          <a:effectRef idx="2">
+            <a:schemeClr val="accent1"/>
+          </a:effectRef>
+          <a:fontRef idx="minor">
+            <a:schemeClr val="lt1"/>
+          </a:fontRef>
+        </p:style>
+        <p:txBody>
+          <a:bodyPr rtlCol="0" anchor="ctr"/>
+          <a:lstStyle/>
+          <a:p>
+            <a:pPr algn="ctr"/>
+          </a:p>
+        </p:txBody>
+      </p:sp>
+      <p:sp>
+        <p:nvSpPr>
+          <p:cNvPr id="40" name="TextBox 39"/>
+          <p:cNvSpPr txBox="1"/>
+          <p:nvPr/>
+        </p:nvSpPr>
+        <p:spPr>
+          <a:xfrm>
+            <a:off x="640080" y="3977640"/>
+            <a:ext cx="10881360" cy="2240280"/>
+          </a:xfrm>
+          <a:prstGeom prst="rect">
+            <a:avLst/>
+          </a:prstGeom>
+          <a:noFill/>
+        </p:spPr>
+        <p:txBody>
+          <a:bodyPr wrap="square">
+            <a:spAutoFit/>
+          </a:bodyPr>
+          <a:lstStyle/>
+          <a:p>
+            <a:pPr algn="l"/>
+            <a:r>
+              <a:rPr sz="1100" b="0">
                 <a:solidFill>
                   <a:srgbClr val="E0E8F5"/>
                 </a:solidFill>
               </a:rPr>
-              <a:t>• 에이전트 하네스 공부</a:t>
-            </a:r>
-          </a:p>
-        </p:txBody>
-      </p:sp>
-      <p:sp>
-        <p:nvSpPr>
-          <p:cNvPr id="39" name="Rectangle 38"/>
+              <a:t>※ 음성 전사 미실행. scripts/pipeline.py --year-month 2604 실행 시 Drive 바코스/2604/음성녹음/바코스 4-21.m4a 파일을 바코스/models/ggml-large-v3.bin (Whisper large-v3) 모델로 전사하여 이 영역에 자동 삽입됩니다.</a:t>
+            </a:r>
+          </a:p>
+        </p:txBody>
+      </p:sp>
+      <p:sp>
+        <p:nvSpPr>
+          <p:cNvPr id="41" name="Rectangle 40"/>
           <p:cNvSpPr/>
           <p:nvPr/>
         </p:nvSpPr>
@@ -9320,7 +9500,7 @@
       </p:sp>
       <p:sp>
         <p:nvSpPr>
-          <p:cNvPr id="40" name="TextBox 39"/>
+          <p:cNvPr id="42" name="TextBox 41"/>
           <p:cNvSpPr txBox="1"/>
           <p:nvPr/>
         </p:nvSpPr>
@@ -9347,7 +9527,7 @@
                   <a:srgbClr val="888888"/>
                 </a:solidFill>
               </a:rPr>
-              <a:t>BCS 스터디 · 2026년 4월 · 4/21</a:t>
+              <a:t>BCS 스터디 · 2026년 4월 · 4/21 · 회의록 + 녹취록 통합</a:t>
             </a:r>
           </a:p>
         </p:txBody>
@@ -9681,7 +9861,7 @@
                   <a:srgbClr val="FFFFFF"/>
                 </a:solidFill>
               </a:rPr>
-              <a:t>▪ 이번주 진행 내용</a:t>
+              <a:t>▪ 진행 내용 (회의록)</a:t>
             </a:r>
           </a:p>
         </p:txBody>
@@ -9695,7 +9875,7 @@
         <p:spPr>
           <a:xfrm>
             <a:off x="457200" y="1261872"/>
-            <a:ext cx="7040880" cy="457200"/>
+            <a:ext cx="7040880" cy="347472"/>
           </a:xfrm>
           <a:prstGeom prst="rect">
             <a:avLst/>
@@ -9737,8 +9917,8 @@
         </p:nvSpPr>
         <p:spPr>
           <a:xfrm>
-            <a:off x="566928" y="1325880"/>
-            <a:ext cx="1554480" cy="402336"/>
+            <a:off x="566928" y="1307592"/>
+            <a:ext cx="1554480" cy="310896"/>
           </a:xfrm>
           <a:prstGeom prst="rect">
             <a:avLst/>
@@ -9753,7 +9933,7 @@
           <a:p>
             <a:pPr algn="l"/>
             <a:r>
-              <a:rPr sz="1200" b="1">
+              <a:rPr sz="1100" b="1">
                 <a:solidFill>
                   <a:srgbClr val="FFD700"/>
                 </a:solidFill>
@@ -9771,8 +9951,8 @@
         </p:nvSpPr>
         <p:spPr>
           <a:xfrm>
-            <a:off x="2240280" y="1325880"/>
-            <a:ext cx="5120640" cy="402336"/>
+            <a:off x="2240280" y="1307592"/>
+            <a:ext cx="5120640" cy="310896"/>
           </a:xfrm>
           <a:prstGeom prst="rect">
             <a:avLst/>
@@ -9787,7 +9967,7 @@
           <a:p>
             <a:pPr algn="l"/>
             <a:r>
-              <a:rPr sz="1100" b="0">
+              <a:rPr sz="1000" b="0">
                 <a:solidFill>
                   <a:srgbClr val="FFFFFF"/>
                 </a:solidFill>
@@ -9805,8 +9985,8 @@
         </p:nvSpPr>
         <p:spPr>
           <a:xfrm>
-            <a:off x="457200" y="1755648"/>
-            <a:ext cx="7040880" cy="457200"/>
+            <a:off x="457200" y="1645920"/>
+            <a:ext cx="7040880" cy="347472"/>
           </a:xfrm>
           <a:prstGeom prst="rect">
             <a:avLst/>
@@ -9848,8 +10028,8 @@
         </p:nvSpPr>
         <p:spPr>
           <a:xfrm>
-            <a:off x="566928" y="1819656"/>
-            <a:ext cx="1554480" cy="402336"/>
+            <a:off x="566928" y="1691640"/>
+            <a:ext cx="1554480" cy="310896"/>
           </a:xfrm>
           <a:prstGeom prst="rect">
             <a:avLst/>
@@ -9864,7 +10044,7 @@
           <a:p>
             <a:pPr algn="l"/>
             <a:r>
-              <a:rPr sz="1200" b="1">
+              <a:rPr sz="1100" b="1">
                 <a:solidFill>
                   <a:srgbClr val="FFD700"/>
                 </a:solidFill>
@@ -9882,8 +10062,8 @@
         </p:nvSpPr>
         <p:spPr>
           <a:xfrm>
-            <a:off x="2240280" y="1819656"/>
-            <a:ext cx="5120640" cy="402336"/>
+            <a:off x="2240280" y="1691640"/>
+            <a:ext cx="5120640" cy="310896"/>
           </a:xfrm>
           <a:prstGeom prst="rect">
             <a:avLst/>
@@ -9898,7 +10078,7 @@
           <a:p>
             <a:pPr algn="l"/>
             <a:r>
-              <a:rPr sz="1100" b="0">
+              <a:rPr sz="1000" b="0">
                 <a:solidFill>
                   <a:srgbClr val="FFFFFF"/>
                 </a:solidFill>
@@ -9916,8 +10096,8 @@
         </p:nvSpPr>
         <p:spPr>
           <a:xfrm>
-            <a:off x="457200" y="2249424"/>
-            <a:ext cx="7040880" cy="457200"/>
+            <a:off x="457200" y="2029968"/>
+            <a:ext cx="7040880" cy="347472"/>
           </a:xfrm>
           <a:prstGeom prst="rect">
             <a:avLst/>
@@ -9959,8 +10139,8 @@
         </p:nvSpPr>
         <p:spPr>
           <a:xfrm>
-            <a:off x="566928" y="2313432"/>
-            <a:ext cx="1554480" cy="402336"/>
+            <a:off x="566928" y="2075688"/>
+            <a:ext cx="1554480" cy="310896"/>
           </a:xfrm>
           <a:prstGeom prst="rect">
             <a:avLst/>
@@ -9975,7 +10155,7 @@
           <a:p>
             <a:pPr algn="l"/>
             <a:r>
-              <a:rPr sz="1200" b="1">
+              <a:rPr sz="1100" b="1">
                 <a:solidFill>
                   <a:srgbClr val="FFD700"/>
                 </a:solidFill>
@@ -9993,8 +10173,8 @@
         </p:nvSpPr>
         <p:spPr>
           <a:xfrm>
-            <a:off x="2240280" y="2313432"/>
-            <a:ext cx="5120640" cy="402336"/>
+            <a:off x="2240280" y="2075688"/>
+            <a:ext cx="5120640" cy="310896"/>
           </a:xfrm>
           <a:prstGeom prst="rect">
             <a:avLst/>
@@ -10009,7 +10189,7 @@
           <a:p>
             <a:pPr algn="l"/>
             <a:r>
-              <a:rPr sz="1100" b="0">
+              <a:rPr sz="1000" b="0">
                 <a:solidFill>
                   <a:srgbClr val="FFFFFF"/>
                 </a:solidFill>
@@ -10027,8 +10207,8 @@
         </p:nvSpPr>
         <p:spPr>
           <a:xfrm>
-            <a:off x="457200" y="2743200"/>
-            <a:ext cx="7040880" cy="457200"/>
+            <a:off x="457200" y="2414016"/>
+            <a:ext cx="7040880" cy="347472"/>
           </a:xfrm>
           <a:prstGeom prst="rect">
             <a:avLst/>
@@ -10070,8 +10250,8 @@
         </p:nvSpPr>
         <p:spPr>
           <a:xfrm>
-            <a:off x="566928" y="2807208"/>
-            <a:ext cx="1554480" cy="402336"/>
+            <a:off x="566928" y="2459736"/>
+            <a:ext cx="1554480" cy="310896"/>
           </a:xfrm>
           <a:prstGeom prst="rect">
             <a:avLst/>
@@ -10086,7 +10266,7 @@
           <a:p>
             <a:pPr algn="l"/>
             <a:r>
-              <a:rPr sz="1200" b="1">
+              <a:rPr sz="1100" b="1">
                 <a:solidFill>
                   <a:srgbClr val="FFD700"/>
                 </a:solidFill>
@@ -10104,8 +10284,8 @@
         </p:nvSpPr>
         <p:spPr>
           <a:xfrm>
-            <a:off x="2240280" y="2807208"/>
-            <a:ext cx="5120640" cy="402336"/>
+            <a:off x="2240280" y="2459736"/>
+            <a:ext cx="5120640" cy="310896"/>
           </a:xfrm>
           <a:prstGeom prst="rect">
             <a:avLst/>
@@ -10120,7 +10300,7 @@
           <a:p>
             <a:pPr algn="l"/>
             <a:r>
-              <a:rPr sz="1100" b="0">
+              <a:rPr sz="1000" b="0">
                 <a:solidFill>
                   <a:srgbClr val="FFFFFF"/>
                 </a:solidFill>
@@ -10138,8 +10318,8 @@
         </p:nvSpPr>
         <p:spPr>
           <a:xfrm>
-            <a:off x="457200" y="3236976"/>
-            <a:ext cx="7040880" cy="457200"/>
+            <a:off x="457200" y="2798064"/>
+            <a:ext cx="7040880" cy="347472"/>
           </a:xfrm>
           <a:prstGeom prst="rect">
             <a:avLst/>
@@ -10181,8 +10361,8 @@
         </p:nvSpPr>
         <p:spPr>
           <a:xfrm>
-            <a:off x="566928" y="3300984"/>
-            <a:ext cx="1554480" cy="402336"/>
+            <a:off x="566928" y="2843784"/>
+            <a:ext cx="1554480" cy="310896"/>
           </a:xfrm>
           <a:prstGeom prst="rect">
             <a:avLst/>
@@ -10197,7 +10377,7 @@
           <a:p>
             <a:pPr algn="l"/>
             <a:r>
-              <a:rPr sz="1200" b="1">
+              <a:rPr sz="1100" b="1">
                 <a:solidFill>
                   <a:srgbClr val="FFD700"/>
                 </a:solidFill>
@@ -10215,8 +10395,8 @@
         </p:nvSpPr>
         <p:spPr>
           <a:xfrm>
-            <a:off x="2240280" y="3300984"/>
-            <a:ext cx="5120640" cy="402336"/>
+            <a:off x="2240280" y="2843784"/>
+            <a:ext cx="5120640" cy="310896"/>
           </a:xfrm>
           <a:prstGeom prst="rect">
             <a:avLst/>
@@ -10231,7 +10411,7 @@
           <a:p>
             <a:pPr algn="l"/>
             <a:r>
-              <a:rPr sz="1100" b="0">
+              <a:rPr sz="1000" b="0">
                 <a:solidFill>
                   <a:srgbClr val="FFFFFF"/>
                 </a:solidFill>
@@ -10313,7 +10493,7 @@
                   <a:srgbClr val="FFD700"/>
                 </a:solidFill>
               </a:rPr>
-              <a:t>💡 Insights</a:t>
+              <a:t>💡 Insights (회의록)</a:t>
             </a:r>
           </a:p>
         </p:txBody>
@@ -10327,7 +10507,7 @@
         <p:spPr>
           <a:xfrm>
             <a:off x="7680960" y="1307592"/>
-            <a:ext cx="4023360" cy="640080"/>
+            <a:ext cx="4023360" cy="384048"/>
           </a:xfrm>
           <a:prstGeom prst="rect">
             <a:avLst/>
@@ -10369,8 +10549,8 @@
         </p:nvSpPr>
         <p:spPr>
           <a:xfrm>
-            <a:off x="7772400" y="1362456"/>
-            <a:ext cx="3840480" cy="566928"/>
+            <a:off x="7772400" y="1344168"/>
+            <a:ext cx="3840480" cy="329184"/>
           </a:xfrm>
           <a:prstGeom prst="rect">
             <a:avLst/>
@@ -10403,8 +10583,8 @@
         </p:nvSpPr>
         <p:spPr>
           <a:xfrm>
-            <a:off x="7680960" y="1984248"/>
-            <a:ext cx="4023360" cy="640080"/>
+            <a:off x="7680960" y="1728216"/>
+            <a:ext cx="4023360" cy="384048"/>
           </a:xfrm>
           <a:prstGeom prst="rect">
             <a:avLst/>
@@ -10446,8 +10626,8 @@
         </p:nvSpPr>
         <p:spPr>
           <a:xfrm>
-            <a:off x="7772400" y="2039112"/>
-            <a:ext cx="3840480" cy="566928"/>
+            <a:off x="7772400" y="1764792"/>
+            <a:ext cx="3840480" cy="329184"/>
           </a:xfrm>
           <a:prstGeom prst="rect">
             <a:avLst/>
@@ -10480,8 +10660,8 @@
         </p:nvSpPr>
         <p:spPr>
           <a:xfrm>
-            <a:off x="7680960" y="2660904"/>
-            <a:ext cx="4023360" cy="640080"/>
+            <a:off x="7680960" y="2148840"/>
+            <a:ext cx="4023360" cy="384048"/>
           </a:xfrm>
           <a:prstGeom prst="rect">
             <a:avLst/>
@@ -10523,8 +10703,8 @@
         </p:nvSpPr>
         <p:spPr>
           <a:xfrm>
-            <a:off x="7772400" y="2715768"/>
-            <a:ext cx="3840480" cy="566928"/>
+            <a:off x="7772400" y="2185416"/>
+            <a:ext cx="3840480" cy="329184"/>
           </a:xfrm>
           <a:prstGeom prst="rect">
             <a:avLst/>
@@ -10557,8 +10737,8 @@
         </p:nvSpPr>
         <p:spPr>
           <a:xfrm>
-            <a:off x="7680960" y="3337560"/>
-            <a:ext cx="4023360" cy="640080"/>
+            <a:off x="7680960" y="2569464"/>
+            <a:ext cx="4023360" cy="384048"/>
           </a:xfrm>
           <a:prstGeom prst="rect">
             <a:avLst/>
@@ -10600,8 +10780,8 @@
         </p:nvSpPr>
         <p:spPr>
           <a:xfrm>
-            <a:off x="7772400" y="3392424"/>
-            <a:ext cx="3840480" cy="566928"/>
+            <a:off x="7772400" y="2606040"/>
+            <a:ext cx="3840480" cy="329184"/>
           </a:xfrm>
           <a:prstGeom prst="rect">
             <a:avLst/>
@@ -10634,8 +10814,8 @@
         </p:nvSpPr>
         <p:spPr>
           <a:xfrm>
-            <a:off x="7680960" y="4014216"/>
-            <a:ext cx="4023360" cy="640080"/>
+            <a:off x="7680960" y="2990088"/>
+            <a:ext cx="4023360" cy="384048"/>
           </a:xfrm>
           <a:prstGeom prst="rect">
             <a:avLst/>
@@ -10677,8 +10857,8 @@
         </p:nvSpPr>
         <p:spPr>
           <a:xfrm>
-            <a:off x="7772400" y="4069080"/>
-            <a:ext cx="3840480" cy="566928"/>
+            <a:off x="7772400" y="3026664"/>
+            <a:ext cx="3840480" cy="329184"/>
           </a:xfrm>
           <a:prstGeom prst="rect">
             <a:avLst/>
@@ -10706,6 +10886,160 @@
       <p:sp>
         <p:nvSpPr>
           <p:cNvPr id="37" name="Rectangle 36"/>
+          <p:cNvSpPr/>
+          <p:nvPr/>
+        </p:nvSpPr>
+        <p:spPr>
+          <a:xfrm>
+            <a:off x="457200" y="3520440"/>
+            <a:ext cx="11247120" cy="329184"/>
+          </a:xfrm>
+          <a:prstGeom prst="rect">
+            <a:avLst/>
+          </a:prstGeom>
+          <a:solidFill>
+            <a:srgbClr val="2D4A82"/>
+          </a:solidFill>
+          <a:ln>
+            <a:noFill/>
+          </a:ln>
+        </p:spPr>
+        <p:style>
+          <a:lnRef idx="1">
+            <a:schemeClr val="accent1"/>
+          </a:lnRef>
+          <a:fillRef idx="3">
+            <a:schemeClr val="accent1"/>
+          </a:fillRef>
+          <a:effectRef idx="2">
+            <a:schemeClr val="accent1"/>
+          </a:effectRef>
+          <a:fontRef idx="minor">
+            <a:schemeClr val="lt1"/>
+          </a:fontRef>
+        </p:style>
+        <p:txBody>
+          <a:bodyPr rtlCol="0" anchor="ctr"/>
+          <a:lstStyle/>
+          <a:p>
+            <a:pPr algn="ctr"/>
+          </a:p>
+        </p:txBody>
+      </p:sp>
+      <p:sp>
+        <p:nvSpPr>
+          <p:cNvPr id="38" name="TextBox 37"/>
+          <p:cNvSpPr txBox="1"/>
+          <p:nvPr/>
+        </p:nvSpPr>
+        <p:spPr>
+          <a:xfrm>
+            <a:off x="548640" y="3547872"/>
+            <a:ext cx="10972800" cy="274320"/>
+          </a:xfrm>
+          <a:prstGeom prst="rect">
+            <a:avLst/>
+          </a:prstGeom>
+          <a:noFill/>
+        </p:spPr>
+        <p:txBody>
+          <a:bodyPr wrap="square">
+            <a:spAutoFit/>
+          </a:bodyPr>
+          <a:lstStyle/>
+          <a:p>
+            <a:pPr algn="l"/>
+            <a:r>
+              <a:rPr sz="1300" b="1">
+                <a:solidFill>
+                  <a:srgbClr val="FFD700"/>
+                </a:solidFill>
+              </a:rPr>
+              <a:t>🎙 음성 전사 핵심 내용</a:t>
+            </a:r>
+          </a:p>
+        </p:txBody>
+      </p:sp>
+      <p:sp>
+        <p:nvSpPr>
+          <p:cNvPr id="39" name="Rectangle 38"/>
+          <p:cNvSpPr/>
+          <p:nvPr/>
+        </p:nvSpPr>
+        <p:spPr>
+          <a:xfrm>
+            <a:off x="457200" y="3886200"/>
+            <a:ext cx="11247120" cy="2423160"/>
+          </a:xfrm>
+          <a:prstGeom prst="rect">
+            <a:avLst/>
+          </a:prstGeom>
+          <a:solidFill>
+            <a:srgbClr val="0A1428"/>
+          </a:solidFill>
+          <a:ln>
+            <a:noFill/>
+          </a:ln>
+        </p:spPr>
+        <p:style>
+          <a:lnRef idx="1">
+            <a:schemeClr val="accent1"/>
+          </a:lnRef>
+          <a:fillRef idx="3">
+            <a:schemeClr val="accent1"/>
+          </a:fillRef>
+          <a:effectRef idx="2">
+            <a:schemeClr val="accent1"/>
+          </a:effectRef>
+          <a:fontRef idx="minor">
+            <a:schemeClr val="lt1"/>
+          </a:fontRef>
+        </p:style>
+        <p:txBody>
+          <a:bodyPr rtlCol="0" anchor="ctr"/>
+          <a:lstStyle/>
+          <a:p>
+            <a:pPr algn="ctr"/>
+          </a:p>
+        </p:txBody>
+      </p:sp>
+      <p:sp>
+        <p:nvSpPr>
+          <p:cNvPr id="40" name="TextBox 39"/>
+          <p:cNvSpPr txBox="1"/>
+          <p:nvPr/>
+        </p:nvSpPr>
+        <p:spPr>
+          <a:xfrm>
+            <a:off x="640080" y="3977640"/>
+            <a:ext cx="10881360" cy="2240280"/>
+          </a:xfrm>
+          <a:prstGeom prst="rect">
+            <a:avLst/>
+          </a:prstGeom>
+          <a:noFill/>
+        </p:spPr>
+        <p:txBody>
+          <a:bodyPr wrap="square">
+            <a:spAutoFit/>
+          </a:bodyPr>
+          <a:lstStyle/>
+          <a:p>
+            <a:pPr algn="l"/>
+            <a:r>
+              <a:rPr sz="1100" b="0">
+                <a:solidFill>
+                  <a:srgbClr val="E0E8F5"/>
+                </a:solidFill>
+              </a:rPr>
+              <a:t>※ 음성 전사 미실행. scripts/pipeline.py --year-month 2604 실행 시 Drive 바코스/2604/음성녹음/바코스 4-29.m4a 파일을 바코스/models/ggml-large-v3.bin (Whisper large-v3) 모델로 전사하여 이 영역에 자동 삽입됩니다.</a:t>
+            </a:r>
+          </a:p>
+        </p:txBody>
+      </p:sp>
+      <p:sp>
+        <p:nvSpPr>
+          <p:cNvPr id="41" name="Rectangle 40"/>
           <p:cNvSpPr/>
           <p:nvPr/>
         </p:nvSpPr>
@@ -10748,7 +11082,7 @@
       </p:sp>
       <p:sp>
         <p:nvSpPr>
-          <p:cNvPr id="38" name="TextBox 37"/>
+          <p:cNvPr id="42" name="TextBox 41"/>
           <p:cNvSpPr txBox="1"/>
           <p:nvPr/>
         </p:nvSpPr>
@@ -10775,7 +11109,7 @@
                   <a:srgbClr val="888888"/>
                 </a:solidFill>
               </a:rPr>
-              <a:t>BCS 스터디 · 2026년 4월 · 4/29</a:t>
+              <a:t>BCS 스터디 · 2026년 4월 · 4/29 · 회의록 + 녹취록 통합</a:t>
             </a:r>
           </a:p>
         </p:txBody>
@@ -11807,8 +12141,8 @@
         </p:nvSpPr>
         <p:spPr>
           <a:xfrm>
-            <a:off x="548640" y="182880"/>
-            <a:ext cx="10972800" cy="640080"/>
+            <a:off x="457200" y="109728"/>
+            <a:ext cx="10972800" cy="594360"/>
           </a:xfrm>
           <a:prstGeom prst="rect">
             <a:avLst/>
@@ -11823,26 +12157,50 @@
           <a:p>
             <a:pPr algn="l"/>
             <a:r>
-              <a:rPr sz="2800" b="1">
+              <a:rPr sz="2400" b="1">
                 <a:solidFill>
                   <a:srgbClr val="FFD700"/>
                 </a:solidFill>
               </a:rPr>
-              <a:t>🎙 음성 전사 요약</a:t>
-            </a:r>
-          </a:p>
-        </p:txBody>
-      </p:sp>
-      <p:sp>
-        <p:nvSpPr>
-          <p:cNvPr id="4" name="Rectangle 3"/>
+              <a:t>📸 스터디 인증 사진 (1/4) · 4월 7일</a:t>
+            </a:r>
+          </a:p>
+        </p:txBody>
+      </p:sp>
+      <p:pic>
+        <p:nvPicPr>
+          <p:cNvPr id="4" name="Picture 3" descr="0407.jpg"/>
+          <p:cNvPicPr>
+            <a:picLocks noChangeAspect="1"/>
+          </p:cNvPicPr>
+          <p:nvPr/>
+        </p:nvPicPr>
+        <p:blipFill>
+          <a:blip r:embed="rId2"/>
+          <a:stretch>
+            <a:fillRect/>
+          </a:stretch>
+        </p:blipFill>
+        <p:spPr>
+          <a:xfrm>
+            <a:off x="2797805" y="914400"/>
+            <a:ext cx="6593342" cy="5303520"/>
+          </a:xfrm>
+          <a:prstGeom prst="rect">
+            <a:avLst/>
+          </a:prstGeom>
+        </p:spPr>
+      </p:pic>
+      <p:sp>
+        <p:nvSpPr>
+          <p:cNvPr id="5" name="Rectangle 4"/>
           <p:cNvSpPr/>
           <p:nvPr/>
         </p:nvSpPr>
         <p:spPr>
           <a:xfrm>
-            <a:off x="457200" y="914400"/>
-            <a:ext cx="11247120" cy="914400"/>
+            <a:off x="0" y="6446520"/>
+            <a:ext cx="12188952" cy="411480"/>
           </a:xfrm>
           <a:prstGeom prst="rect">
             <a:avLst/>
@@ -11878,548 +12236,7 @@
       </p:sp>
       <p:sp>
         <p:nvSpPr>
-          <p:cNvPr id="5" name="TextBox 4"/>
-          <p:cNvSpPr txBox="1"/>
-          <p:nvPr/>
-        </p:nvSpPr>
-        <p:spPr>
-          <a:xfrm>
-            <a:off x="640080" y="960120"/>
-            <a:ext cx="10881360" cy="822960"/>
-          </a:xfrm>
-          <a:prstGeom prst="rect">
-            <a:avLst/>
-          </a:prstGeom>
-          <a:noFill/>
-        </p:spPr>
-        <p:txBody>
-          <a:bodyPr wrap="square">
-            <a:spAutoFit/>
-          </a:bodyPr>
-          <a:lstStyle/>
-          <a:p>
-            <a:pPr algn="l"/>
-            <a:r>
-              <a:rPr sz="1200" b="0">
-                <a:solidFill>
-                  <a:srgbClr val="E0E8F5"/>
-                </a:solidFill>
-              </a:rPr>
-              <a:t>※ 음성 전사는 Google Drive 바코스/models/ggml-large-v3.bin (Whisper large-v3)
-   모델을 사용하여 transcribe.py 스크립트로 생성됩니다.
-   전사 파일은 Drive 바코스/2604/음성전사/ 폴더에 업로드됩니다.</a:t>
-            </a:r>
-          </a:p>
-        </p:txBody>
-      </p:sp>
-      <p:sp>
-        <p:nvSpPr>
-          <p:cNvPr id="6" name="Rectangle 5"/>
-          <p:cNvSpPr/>
-          <p:nvPr/>
-        </p:nvSpPr>
-        <p:spPr>
-          <a:xfrm>
-            <a:off x="457200" y="2011680"/>
-            <a:ext cx="11247120" cy="1280160"/>
-          </a:xfrm>
-          <a:prstGeom prst="rect">
-            <a:avLst/>
-          </a:prstGeom>
-          <a:solidFill>
-            <a:srgbClr val="0F1A30"/>
-          </a:solidFill>
-          <a:ln>
-            <a:noFill/>
-          </a:ln>
-        </p:spPr>
-        <p:style>
-          <a:lnRef idx="1">
-            <a:schemeClr val="accent1"/>
-          </a:lnRef>
-          <a:fillRef idx="3">
-            <a:schemeClr val="accent1"/>
-          </a:fillRef>
-          <a:effectRef idx="2">
-            <a:schemeClr val="accent1"/>
-          </a:effectRef>
-          <a:fontRef idx="minor">
-            <a:schemeClr val="lt1"/>
-          </a:fontRef>
-        </p:style>
-        <p:txBody>
-          <a:bodyPr rtlCol="0" anchor="ctr"/>
-          <a:lstStyle/>
-          <a:p>
-            <a:pPr algn="ctr"/>
-          </a:p>
-        </p:txBody>
-      </p:sp>
-      <p:sp>
-        <p:nvSpPr>
-          <p:cNvPr id="7" name="Rectangle 6"/>
-          <p:cNvSpPr/>
-          <p:nvPr/>
-        </p:nvSpPr>
-        <p:spPr>
-          <a:xfrm>
-            <a:off x="457200" y="2011680"/>
-            <a:ext cx="73152" cy="1280160"/>
-          </a:xfrm>
-          <a:prstGeom prst="rect">
-            <a:avLst/>
-          </a:prstGeom>
-          <a:solidFill>
-            <a:srgbClr val="FFD700"/>
-          </a:solidFill>
-          <a:ln>
-            <a:noFill/>
-          </a:ln>
-        </p:spPr>
-        <p:style>
-          <a:lnRef idx="1">
-            <a:schemeClr val="accent1"/>
-          </a:lnRef>
-          <a:fillRef idx="3">
-            <a:schemeClr val="accent1"/>
-          </a:fillRef>
-          <a:effectRef idx="2">
-            <a:schemeClr val="accent1"/>
-          </a:effectRef>
-          <a:fontRef idx="minor">
-            <a:schemeClr val="lt1"/>
-          </a:fontRef>
-        </p:style>
-        <p:txBody>
-          <a:bodyPr rtlCol="0" anchor="ctr"/>
-          <a:lstStyle/>
-          <a:p>
-            <a:pPr algn="ctr"/>
-          </a:p>
-        </p:txBody>
-      </p:sp>
-      <p:sp>
-        <p:nvSpPr>
-          <p:cNvPr id="8" name="TextBox 7"/>
-          <p:cNvSpPr txBox="1"/>
-          <p:nvPr/>
-        </p:nvSpPr>
-        <p:spPr>
-          <a:xfrm>
-            <a:off x="658368" y="2103120"/>
-            <a:ext cx="10789920" cy="411480"/>
-          </a:xfrm>
-          <a:prstGeom prst="rect">
-            <a:avLst/>
-          </a:prstGeom>
-          <a:noFill/>
-        </p:spPr>
-        <p:txBody>
-          <a:bodyPr wrap="square">
-            <a:spAutoFit/>
-          </a:bodyPr>
-          <a:lstStyle/>
-          <a:p>
-            <a:pPr algn="l"/>
-            <a:r>
-              <a:rPr sz="1400" b="1">
-                <a:solidFill>
-                  <a:srgbClr val="FFD700"/>
-                </a:solidFill>
-              </a:rPr>
-              <a:t>📁 4/7 회의 (바코스 4-7.m4a)</a:t>
-            </a:r>
-          </a:p>
-        </p:txBody>
-      </p:sp>
-      <p:sp>
-        <p:nvSpPr>
-          <p:cNvPr id="9" name="TextBox 8"/>
-          <p:cNvSpPr txBox="1"/>
-          <p:nvPr/>
-        </p:nvSpPr>
-        <p:spPr>
-          <a:xfrm>
-            <a:off x="658368" y="2560320"/>
-            <a:ext cx="10789920" cy="594360"/>
-          </a:xfrm>
-          <a:prstGeom prst="rect">
-            <a:avLst/>
-          </a:prstGeom>
-          <a:noFill/>
-        </p:spPr>
-        <p:txBody>
-          <a:bodyPr wrap="square">
-            <a:spAutoFit/>
-          </a:bodyPr>
-          <a:lstStyle/>
-          <a:p>
-            <a:pPr algn="l"/>
-            <a:r>
-              <a:rPr sz="1100" b="0">
-                <a:solidFill>
-                  <a:srgbClr val="E0E8F5"/>
-                </a:solidFill>
-              </a:rPr>
-              <a:t>   ↳ pipeline.py --year-month 2604 실행 후 음성전사 내용이 여기에 표시됩니다</a:t>
-            </a:r>
-          </a:p>
-        </p:txBody>
-      </p:sp>
-      <p:sp>
-        <p:nvSpPr>
-          <p:cNvPr id="10" name="Rectangle 9"/>
-          <p:cNvSpPr/>
-          <p:nvPr/>
-        </p:nvSpPr>
-        <p:spPr>
-          <a:xfrm>
-            <a:off x="457200" y="3383280"/>
-            <a:ext cx="11247120" cy="1280160"/>
-          </a:xfrm>
-          <a:prstGeom prst="rect">
-            <a:avLst/>
-          </a:prstGeom>
-          <a:solidFill>
-            <a:srgbClr val="0F1A30"/>
-          </a:solidFill>
-          <a:ln>
-            <a:noFill/>
-          </a:ln>
-        </p:spPr>
-        <p:style>
-          <a:lnRef idx="1">
-            <a:schemeClr val="accent1"/>
-          </a:lnRef>
-          <a:fillRef idx="3">
-            <a:schemeClr val="accent1"/>
-          </a:fillRef>
-          <a:effectRef idx="2">
-            <a:schemeClr val="accent1"/>
-          </a:effectRef>
-          <a:fontRef idx="minor">
-            <a:schemeClr val="lt1"/>
-          </a:fontRef>
-        </p:style>
-        <p:txBody>
-          <a:bodyPr rtlCol="0" anchor="ctr"/>
-          <a:lstStyle/>
-          <a:p>
-            <a:pPr algn="ctr"/>
-          </a:p>
-        </p:txBody>
-      </p:sp>
-      <p:sp>
-        <p:nvSpPr>
-          <p:cNvPr id="11" name="Rectangle 10"/>
-          <p:cNvSpPr/>
-          <p:nvPr/>
-        </p:nvSpPr>
-        <p:spPr>
-          <a:xfrm>
-            <a:off x="457200" y="3383280"/>
-            <a:ext cx="73152" cy="1280160"/>
-          </a:xfrm>
-          <a:prstGeom prst="rect">
-            <a:avLst/>
-          </a:prstGeom>
-          <a:solidFill>
-            <a:srgbClr val="FFD700"/>
-          </a:solidFill>
-          <a:ln>
-            <a:noFill/>
-          </a:ln>
-        </p:spPr>
-        <p:style>
-          <a:lnRef idx="1">
-            <a:schemeClr val="accent1"/>
-          </a:lnRef>
-          <a:fillRef idx="3">
-            <a:schemeClr val="accent1"/>
-          </a:fillRef>
-          <a:effectRef idx="2">
-            <a:schemeClr val="accent1"/>
-          </a:effectRef>
-          <a:fontRef idx="minor">
-            <a:schemeClr val="lt1"/>
-          </a:fontRef>
-        </p:style>
-        <p:txBody>
-          <a:bodyPr rtlCol="0" anchor="ctr"/>
-          <a:lstStyle/>
-          <a:p>
-            <a:pPr algn="ctr"/>
-          </a:p>
-        </p:txBody>
-      </p:sp>
-      <p:sp>
-        <p:nvSpPr>
-          <p:cNvPr id="12" name="TextBox 11"/>
-          <p:cNvSpPr txBox="1"/>
-          <p:nvPr/>
-        </p:nvSpPr>
-        <p:spPr>
-          <a:xfrm>
-            <a:off x="658368" y="3474720"/>
-            <a:ext cx="10789920" cy="411480"/>
-          </a:xfrm>
-          <a:prstGeom prst="rect">
-            <a:avLst/>
-          </a:prstGeom>
-          <a:noFill/>
-        </p:spPr>
-        <p:txBody>
-          <a:bodyPr wrap="square">
-            <a:spAutoFit/>
-          </a:bodyPr>
-          <a:lstStyle/>
-          <a:p>
-            <a:pPr algn="l"/>
-            <a:r>
-              <a:rPr sz="1400" b="1">
-                <a:solidFill>
-                  <a:srgbClr val="FFD700"/>
-                </a:solidFill>
-              </a:rPr>
-              <a:t>📁 4/21 회의 (바코스 4-21.m4a)</a:t>
-            </a:r>
-          </a:p>
-        </p:txBody>
-      </p:sp>
-      <p:sp>
-        <p:nvSpPr>
-          <p:cNvPr id="13" name="TextBox 12"/>
-          <p:cNvSpPr txBox="1"/>
-          <p:nvPr/>
-        </p:nvSpPr>
-        <p:spPr>
-          <a:xfrm>
-            <a:off x="658368" y="3931920"/>
-            <a:ext cx="10789920" cy="594360"/>
-          </a:xfrm>
-          <a:prstGeom prst="rect">
-            <a:avLst/>
-          </a:prstGeom>
-          <a:noFill/>
-        </p:spPr>
-        <p:txBody>
-          <a:bodyPr wrap="square">
-            <a:spAutoFit/>
-          </a:bodyPr>
-          <a:lstStyle/>
-          <a:p>
-            <a:pPr algn="l"/>
-            <a:r>
-              <a:rPr sz="1100" b="0">
-                <a:solidFill>
-                  <a:srgbClr val="E0E8F5"/>
-                </a:solidFill>
-              </a:rPr>
-              <a:t>   ↳ pipeline.py --year-month 2604 실행 후 음성전사 내용이 여기에 표시됩니다</a:t>
-            </a:r>
-          </a:p>
-        </p:txBody>
-      </p:sp>
-      <p:sp>
-        <p:nvSpPr>
-          <p:cNvPr id="14" name="Rectangle 13"/>
-          <p:cNvSpPr/>
-          <p:nvPr/>
-        </p:nvSpPr>
-        <p:spPr>
-          <a:xfrm>
-            <a:off x="457200" y="4754880"/>
-            <a:ext cx="11247120" cy="1280160"/>
-          </a:xfrm>
-          <a:prstGeom prst="rect">
-            <a:avLst/>
-          </a:prstGeom>
-          <a:solidFill>
-            <a:srgbClr val="0F1A30"/>
-          </a:solidFill>
-          <a:ln>
-            <a:noFill/>
-          </a:ln>
-        </p:spPr>
-        <p:style>
-          <a:lnRef idx="1">
-            <a:schemeClr val="accent1"/>
-          </a:lnRef>
-          <a:fillRef idx="3">
-            <a:schemeClr val="accent1"/>
-          </a:fillRef>
-          <a:effectRef idx="2">
-            <a:schemeClr val="accent1"/>
-          </a:effectRef>
-          <a:fontRef idx="minor">
-            <a:schemeClr val="lt1"/>
-          </a:fontRef>
-        </p:style>
-        <p:txBody>
-          <a:bodyPr rtlCol="0" anchor="ctr"/>
-          <a:lstStyle/>
-          <a:p>
-            <a:pPr algn="ctr"/>
-          </a:p>
-        </p:txBody>
-      </p:sp>
-      <p:sp>
-        <p:nvSpPr>
-          <p:cNvPr id="15" name="Rectangle 14"/>
-          <p:cNvSpPr/>
-          <p:nvPr/>
-        </p:nvSpPr>
-        <p:spPr>
-          <a:xfrm>
-            <a:off x="457200" y="4754880"/>
-            <a:ext cx="73152" cy="1280160"/>
-          </a:xfrm>
-          <a:prstGeom prst="rect">
-            <a:avLst/>
-          </a:prstGeom>
-          <a:solidFill>
-            <a:srgbClr val="FFD700"/>
-          </a:solidFill>
-          <a:ln>
-            <a:noFill/>
-          </a:ln>
-        </p:spPr>
-        <p:style>
-          <a:lnRef idx="1">
-            <a:schemeClr val="accent1"/>
-          </a:lnRef>
-          <a:fillRef idx="3">
-            <a:schemeClr val="accent1"/>
-          </a:fillRef>
-          <a:effectRef idx="2">
-            <a:schemeClr val="accent1"/>
-          </a:effectRef>
-          <a:fontRef idx="minor">
-            <a:schemeClr val="lt1"/>
-          </a:fontRef>
-        </p:style>
-        <p:txBody>
-          <a:bodyPr rtlCol="0" anchor="ctr"/>
-          <a:lstStyle/>
-          <a:p>
-            <a:pPr algn="ctr"/>
-          </a:p>
-        </p:txBody>
-      </p:sp>
-      <p:sp>
-        <p:nvSpPr>
-          <p:cNvPr id="16" name="TextBox 15"/>
-          <p:cNvSpPr txBox="1"/>
-          <p:nvPr/>
-        </p:nvSpPr>
-        <p:spPr>
-          <a:xfrm>
-            <a:off x="658368" y="4846320"/>
-            <a:ext cx="10789920" cy="411480"/>
-          </a:xfrm>
-          <a:prstGeom prst="rect">
-            <a:avLst/>
-          </a:prstGeom>
-          <a:noFill/>
-        </p:spPr>
-        <p:txBody>
-          <a:bodyPr wrap="square">
-            <a:spAutoFit/>
-          </a:bodyPr>
-          <a:lstStyle/>
-          <a:p>
-            <a:pPr algn="l"/>
-            <a:r>
-              <a:rPr sz="1400" b="1">
-                <a:solidFill>
-                  <a:srgbClr val="FFD700"/>
-                </a:solidFill>
-              </a:rPr>
-              <a:t>📁 4/29 회의 (바코스 4-29.m4a)</a:t>
-            </a:r>
-          </a:p>
-        </p:txBody>
-      </p:sp>
-      <p:sp>
-        <p:nvSpPr>
-          <p:cNvPr id="17" name="TextBox 16"/>
-          <p:cNvSpPr txBox="1"/>
-          <p:nvPr/>
-        </p:nvSpPr>
-        <p:spPr>
-          <a:xfrm>
-            <a:off x="658368" y="5303520"/>
-            <a:ext cx="10789920" cy="594360"/>
-          </a:xfrm>
-          <a:prstGeom prst="rect">
-            <a:avLst/>
-          </a:prstGeom>
-          <a:noFill/>
-        </p:spPr>
-        <p:txBody>
-          <a:bodyPr wrap="square">
-            <a:spAutoFit/>
-          </a:bodyPr>
-          <a:lstStyle/>
-          <a:p>
-            <a:pPr algn="l"/>
-            <a:r>
-              <a:rPr sz="1100" b="0">
-                <a:solidFill>
-                  <a:srgbClr val="E0E8F5"/>
-                </a:solidFill>
-              </a:rPr>
-              <a:t>   ↳ pipeline.py --year-month 2604 실행 후 음성전사 내용이 여기에 표시됩니다</a:t>
-            </a:r>
-          </a:p>
-        </p:txBody>
-      </p:sp>
-      <p:sp>
-        <p:nvSpPr>
-          <p:cNvPr id="18" name="Rectangle 17"/>
-          <p:cNvSpPr/>
-          <p:nvPr/>
-        </p:nvSpPr>
-        <p:spPr>
-          <a:xfrm>
-            <a:off x="0" y="6446520"/>
-            <a:ext cx="12188952" cy="411480"/>
-          </a:xfrm>
-          <a:prstGeom prst="rect">
-            <a:avLst/>
-          </a:prstGeom>
-          <a:solidFill>
-            <a:srgbClr val="0F3A71"/>
-          </a:solidFill>
-          <a:ln>
-            <a:noFill/>
-          </a:ln>
-        </p:spPr>
-        <p:style>
-          <a:lnRef idx="1">
-            <a:schemeClr val="accent1"/>
-          </a:lnRef>
-          <a:fillRef idx="3">
-            <a:schemeClr val="accent1"/>
-          </a:fillRef>
-          <a:effectRef idx="2">
-            <a:schemeClr val="accent1"/>
-          </a:effectRef>
-          <a:fontRef idx="minor">
-            <a:schemeClr val="lt1"/>
-          </a:fontRef>
-        </p:style>
-        <p:txBody>
-          <a:bodyPr rtlCol="0" anchor="ctr"/>
-          <a:lstStyle/>
-          <a:p>
-            <a:pPr algn="ctr"/>
-          </a:p>
-        </p:txBody>
-      </p:sp>
-      <p:sp>
-        <p:nvSpPr>
-          <p:cNvPr id="19" name="TextBox 18"/>
+          <p:cNvPr id="6" name="TextBox 5"/>
           <p:cNvSpPr txBox="1"/>
           <p:nvPr/>
         </p:nvSpPr>
@@ -12441,12 +12258,12 @@
           <a:p>
             <a:pPr algn="ctr"/>
             <a:r>
-              <a:rPr sz="1200" b="0">
-                <a:solidFill>
-                  <a:srgbClr val="FFFFFF"/>
-                </a:solidFill>
-              </a:rPr>
-              <a:t>실행: cd scripts &amp;&amp; python pipeline.py --year-month 2604</a:t>
+              <a:rPr sz="1100" b="0">
+                <a:solidFill>
+                  <a:srgbClr val="E0E8F5"/>
+                </a:solidFill>
+              </a:rPr>
+              <a:t>BCS 스터디 인증 · 2026년 4월 · 4월 7일</a:t>
             </a:r>
           </a:p>
         </p:txBody>
@@ -12549,14 +12366,14 @@
                   <a:srgbClr val="FFD700"/>
                 </a:solidFill>
               </a:rPr>
-              <a:t>📸 스터디 인증 사진 (1/4) · 4월 7일</a:t>
+              <a:t>📸 스터디 인증 사진 (2/4) · 4월 14일</a:t>
             </a:r>
           </a:p>
         </p:txBody>
       </p:sp>
       <p:pic>
         <p:nvPicPr>
-          <p:cNvPr id="4" name="Picture 3" descr="0407.jpg"/>
+          <p:cNvPr id="4" name="Picture 3" descr="0414.jpg"/>
           <p:cNvPicPr>
             <a:picLocks noChangeAspect="1"/>
           </p:cNvPicPr>
@@ -12570,8 +12387,8 @@
         </p:blipFill>
         <p:spPr>
           <a:xfrm>
-            <a:off x="2797805" y="914400"/>
-            <a:ext cx="6593342" cy="5303520"/>
+            <a:off x="2034365" y="914400"/>
+            <a:ext cx="8120222" cy="5303520"/>
           </a:xfrm>
           <a:prstGeom prst="rect">
             <a:avLst/>
@@ -12650,7 +12467,7 @@
                   <a:srgbClr val="E0E8F5"/>
                 </a:solidFill>
               </a:rPr>
-              <a:t>BCS 스터디 인증 · 2026년 4월 · 4월 7일</a:t>
+              <a:t>BCS 스터디 인증 · 2026년 4월 · 4월 14일</a:t>
             </a:r>
           </a:p>
         </p:txBody>
